--- a/Presentation PPT/Presentation PPT.pptx
+++ b/Presentation PPT/Presentation PPT.pptx
@@ -6744,7 +6744,7 @@
                           <a:cs typeface="Calibri"/>
                           <a:sym typeface="Calibri"/>
                         </a:rPr>
-                        <a:t>Adam  (lr = 0.0002)</a:t>
+                        <a:t>Adam (lr = 0.0002, betas 0.5/0.999)</a:t>
                       </a:r>
                       <a:endParaRPr i="1" sz="1500" u="none" cap="none" strike="noStrike">
                         <a:latin typeface="Calibri"/>
@@ -7400,7 +7400,7 @@
                           <a:cs typeface="Calibri"/>
                           <a:sym typeface="Calibri"/>
                         </a:rPr>
-                        <a:t>64</a:t>
+                        <a:t>100</a:t>
                       </a:r>
                       <a:endParaRPr i="1" sz="1500" u="none" cap="none" strike="noStrike">
                         <a:latin typeface="Calibri"/>
@@ -8193,7 +8193,7 @@
                 <a:cs typeface="Calibri"/>
                 <a:sym typeface="Calibri"/>
               </a:rPr>
-              <a:t>ts confidence on real images rose from about 0.78 toward 0.85, while its confidence on generated images fell from about 0.23 toward 0.15.</a:t>
+              <a:t>ts confidence on real images rose from about 0.78 toward 0.87, while its confidence on generated images fell from about 0.23 toward 0.13.</a:t>
             </a:r>
             <a:endParaRPr b="0" i="1" sz="1500" u="none" cap="none" strike="noStrike">
               <a:solidFill>
@@ -8233,7 +8233,7 @@
                 <a:cs typeface="Calibri"/>
                 <a:sym typeface="Calibri"/>
               </a:rPr>
-              <a:t>This pattern is common for a fully-connected generator competing against a comparatively strong discriminator, and it did not stop the generator from producing recognisable digits, as the following slides show.</a:t>
+              <a:t>This pattern is common when training a DCGAN on MNIST, and it did not stop the generator from producing recognisable digits, as the following slides show.</a:t>
             </a:r>
             <a:endParaRPr b="0" i="1" sz="1500" u="none" cap="none" strike="noStrike">
               <a:solidFill>
@@ -8722,7 +8722,7 @@
                 <a:cs typeface="Calibri"/>
                 <a:sym typeface="Calibri"/>
               </a:rPr>
-              <a:t>Random noise, no digit structure</a:t>
+              <a:t>Thick, blobby, often malformed</a:t>
             </a:r>
             <a:endParaRPr b="1" i="0" sz="1500" u="none" cap="none" strike="noStrike">
               <a:solidFill>
@@ -9558,7 +9558,7 @@
                 <a:cs typeface="Calibri"/>
                 <a:sym typeface="Calibri"/>
               </a:rPr>
-              <a:t>Generated digits are visually plausible across most classes, though slightly blurrier than real samples. This is typical of MLP-based generators, which do not exploit the spatial locality that convolutional layers capture.</a:t>
+              <a:t>Generated digits are visually plausible across most classes, with occasional uneven strokes. The Discriminator still separates real from generated with high confidence at the end of training.</a:t>
             </a:r>
             <a:endParaRPr b="0" i="0" sz="1500" u="none" cap="none" strike="noStrike">
               <a:solidFill>
@@ -10668,7 +10668,7 @@
                 <a:cs typeface="Calibri"/>
                 <a:sym typeface="Calibri"/>
               </a:rPr>
-              <a:t>A few ambiguous shapes remain, consistent with the blurring typical of MLP-based generators.</a:t>
+              <a:t>A few ambiguous shapes remain, with occasional uneven stroke thickness.</a:t>
             </a:r>
             <a:endParaRPr b="0" i="1" sz="2000" u="none" cap="none" strike="noStrike">
               <a:solidFill>
@@ -11560,7 +11560,7 @@
                 <a:cs typeface="Calibri"/>
                 <a:sym typeface="Calibri"/>
               </a:rPr>
-              <a:t>MLP-based generation is blurrier than a convolutional (DCGAN-style) approach would produce.</a:t>
+              <a:t>Minor artefacts remain in stroke thickness compared with real MNIST samples.</a:t>
             </a:r>
             <a:endParaRPr b="0" i="1" sz="1800" u="none" cap="none" strike="noStrike">
               <a:solidFill>
@@ -12002,7 +12002,7 @@
                 <a:cs typeface="Cambria"/>
                 <a:sym typeface="Cambria"/>
               </a:rPr>
-              <a:t>A fully-connected GAN was implemented and trained on MNIST for 50 epochs, learning to generate visually plausible handwritten digits from 64-dimensional Gaussian noise across all ten digit classes. Latent space interpolation confirmed the model learned a smooth, structured internal representation rather than memorising the training set. The project validates the core GAN principle: two competing networks, trained together, can produce a working generative model.</a:t>
+              <a:t>A Deep Convolutional GAN (DCGAN) was implemented and trained on MNIST for 50 epochs, learning to generate visually plausible handwritten digits from 100-dimensional Gaussian noise across all ten digit classes. Latent space interpolation confirmed the model learned a smooth, structured internal representation rather than memorising the training set. The project validates the core GAN principle: two competing networks, trained together, can produce a working generative model.</a:t>
             </a:r>
             <a:endParaRPr b="0" i="1" sz="1800" u="none" cap="none" strike="noStrike">
               <a:solidFill>
@@ -12281,7 +12281,7 @@
                 <a:cs typeface="Cambria"/>
                 <a:sym typeface="Cambria"/>
               </a:rPr>
-              <a:t>1.48M</a:t>
+              <a:t>1.94M</a:t>
             </a:r>
             <a:endParaRPr b="0" i="0" sz="2600" u="none" cap="none" strike="noStrike">
               <a:solidFill>
@@ -13893,7 +13893,7 @@
                 <a:cs typeface="Calibri"/>
                 <a:sym typeface="Calibri"/>
               </a:rPr>
-              <a:t>Convolutional Upgrade</a:t>
+              <a:t>Label Smoothing</a:t>
             </a:r>
             <a:endParaRPr b="1" i="0" sz="2000" u="none" cap="none" strike="noStrike">
               <a:solidFill>
@@ -13959,7 +13959,7 @@
                 <a:cs typeface="Calibri"/>
                 <a:sym typeface="Calibri"/>
               </a:rPr>
-              <a:t>Move to a DCGAN-style architecture for sharper, less blurry images.</a:t>
+              <a:t>Smooth real labels or slow the Discriminator to rebalance training.</a:t>
             </a:r>
             <a:endParaRPr b="1" i="0" sz="1800" u="none" cap="none" strike="noStrike">
               <a:solidFill>
@@ -18379,7 +18379,7 @@
                 <a:cs typeface="Calibri"/>
                 <a:sym typeface="Calibri"/>
               </a:rPr>
-              <a:t>64 dimensions)</a:t>
+              <a:t>100 dimensions)</a:t>
             </a:r>
             <a:endParaRPr b="0" i="0" sz="1800" u="none" cap="none" strike="noStrike">
               <a:solidFill>
@@ -23290,7 +23290,7 @@
                 <a:cs typeface="Cambria"/>
                 <a:sym typeface="Cambria"/>
               </a:rPr>
-              <a:t>Methodology: Why a Fully-Connected GAN</a:t>
+              <a:t>Methodology: Why a Convolutional GAN</a:t>
             </a:r>
             <a:endParaRPr b="0" i="0" sz="4500" u="none" cap="none" strike="noStrike">
               <a:solidFill>
@@ -23534,7 +23534,7 @@
                 <a:cs typeface="Calibri"/>
                 <a:sym typeface="Calibri"/>
               </a:rPr>
-              <a:t>This implementation uses a fully-connected (MLP) GAN: </a:t>
+              <a:t>This implementation uses a Deep Convolutional GAN (DCGAN): </a:t>
             </a:r>
             <a:r>
               <a:rPr i="1" lang="en-US" sz="2000">
@@ -23558,7 +23558,7 @@
                 <a:cs typeface="Calibri"/>
                 <a:sym typeface="Calibri"/>
               </a:rPr>
-              <a:t>oth the Generator and Discriminator are stacked Linear layers with Leaky ReLU activations, rather than convolutional layers.</a:t>
+              <a:t>oth networks use convolutional layers instead of a stack of fully-connected ones.</a:t>
             </a:r>
             <a:endParaRPr b="0" i="1" sz="2000" u="none" cap="none" strike="noStrike">
               <a:solidFill>
@@ -23624,7 +23624,7 @@
                 <a:cs typeface="Calibri"/>
                 <a:sym typeface="Calibri"/>
               </a:rPr>
-              <a:t>This keeps the model straightforward to implement, train and reason about, while still performing well on small 28 × 28 greyscale images such as MNIST digits.</a:t>
+              <a:t>Transposed convolutions upsample in the Generator and strided convolutions downsample in the Discriminator, which exploits the spatial structure of images.</a:t>
             </a:r>
             <a:endParaRPr b="0" i="1" sz="2000" u="none" cap="none" strike="noStrike">
               <a:solidFill>
@@ -23848,7 +23848,7 @@
                 <a:cs typeface="Calibri"/>
                 <a:sym typeface="Calibri"/>
               </a:rPr>
-              <a:t>Used in every hidden layer of both networks. Avoids the dead neurons that plain ReLU can cause when inputs go negative.</a:t>
+              <a:t>Used in the Discriminator hidden layers; the Generator uses ReLU. Avoids dead neurons from plain ReLU.</a:t>
             </a:r>
             <a:endParaRPr b="0" i="1" sz="1500" u="none" cap="none" strike="noStrike">
               <a:solidFill>
@@ -24454,7 +24454,7 @@
                 <a:cs typeface="Calibri"/>
                 <a:sym typeface="Calibri"/>
               </a:rPr>
-              <a:t>Flatten &amp; reshape</a:t>
+              <a:t>BatchNorm in both networks</a:t>
             </a:r>
             <a:endParaRPr b="0" i="1" sz="1500" u="none" cap="none" strike="noStrike">
               <a:solidFill>
@@ -24520,7 +24520,7 @@
                 <a:cs typeface="Calibri"/>
                 <a:sym typeface="Calibri"/>
               </a:rPr>
-              <a:t>Images are flattened to 784-dim vectors for the Discriminator, and reshaped back to 28×28 at the Generator output.</a:t>
+              <a:t>Applied after each convolutional layer, except the Generator output and Discriminator input.</a:t>
             </a:r>
             <a:endParaRPr b="0" i="1" sz="1500" u="none" cap="none" strike="noStrike">
               <a:solidFill>
@@ -24943,7 +24943,7 @@
                 <a:cs typeface="Calibri"/>
                 <a:sym typeface="Calibri"/>
               </a:rPr>
-              <a:t>(64,)</a:t>
+              <a:t>(100,)</a:t>
             </a:r>
             <a:endParaRPr b="1" i="0" sz="2000" u="none" cap="none" strike="noStrike">
               <a:solidFill>
@@ -25104,7 +25104,7 @@
                 <a:cs typeface="Calibri"/>
                 <a:sym typeface="Calibri"/>
               </a:rPr>
-              <a:t>Linear(64 → 256) + LeakyReLU(0.2)</a:t>
+              <a:t>Linear(100 → 256×7×7) + BN + ReLU</a:t>
             </a:r>
             <a:endParaRPr b="1" i="0" sz="2000" u="none" cap="none" strike="noStrike">
               <a:solidFill>
@@ -25265,7 +25265,7 @@
                 <a:cs typeface="Calibri"/>
                 <a:sym typeface="Calibri"/>
               </a:rPr>
-              <a:t>Linear(256 → 512) + LeakyReLU(0.2)</a:t>
+              <a:t>Reshape → feature map (256, 7, 7)</a:t>
             </a:r>
             <a:endParaRPr b="1" i="0" sz="2000" u="none" cap="none" strike="noStrike">
               <a:solidFill>
@@ -25426,7 +25426,7 @@
                 <a:cs typeface="Calibri"/>
                 <a:sym typeface="Calibri"/>
               </a:rPr>
-              <a:t>Linear(512 → 1024) + LeakyReLU(0.2)</a:t>
+              <a:t>ConvTranspose(256→128) + BN + ReLU</a:t>
             </a:r>
             <a:endParaRPr b="1" i="0" sz="2000" u="none" cap="none" strike="noStrike">
               <a:solidFill>
@@ -25587,7 +25587,7 @@
                 <a:cs typeface="Calibri"/>
                 <a:sym typeface="Calibri"/>
               </a:rPr>
-              <a:t>Linear(1024 → 784) + Tanh</a:t>
+              <a:t>ConvTranspose(128→64) + BN + ReLU</a:t>
             </a:r>
             <a:endParaRPr b="1" i="0" sz="2000" u="none" cap="none" strike="noStrike">
               <a:solidFill>
@@ -25748,7 +25748,7 @@
                 <a:cs typeface="Calibri"/>
                 <a:sym typeface="Calibri"/>
               </a:rPr>
-              <a:t>Reshape → Image (1, 28, 28)</a:t>
+              <a:t>Conv(64→1) + Tanh → (1, 28, 28)</a:t>
             </a:r>
             <a:endParaRPr b="1" i="0" sz="2000" u="none" cap="none" strike="noStrike">
               <a:solidFill>
@@ -25856,7 +25856,7 @@
                 <a:cs typeface="Calibri"/>
                 <a:sym typeface="Calibri"/>
               </a:rPr>
-              <a:t>Generator parameters: 1,477,136</a:t>
+              <a:t>Generator parameters: 1,935,808</a:t>
             </a:r>
             <a:endParaRPr b="1" i="0" sz="2000" u="none" cap="none" strike="noStrike">
               <a:solidFill>
@@ -26255,7 +26255,7 @@
                 <a:cs typeface="Calibri"/>
                 <a:sym typeface="Calibri"/>
               </a:rPr>
-              <a:t>Input: Image flattened</a:t>
+              <a:t>Input: Image</a:t>
             </a:r>
             <a:r>
               <a:rPr b="1" lang="en-US" sz="2000">
@@ -26279,7 +26279,7 @@
                 <a:cs typeface="Calibri"/>
                 <a:sym typeface="Calibri"/>
               </a:rPr>
-              <a:t>(784,)</a:t>
+              <a:t>(1, 28, 28)</a:t>
             </a:r>
             <a:endParaRPr b="1" i="0" sz="2000" u="none" cap="none" strike="noStrike">
               <a:solidFill>
@@ -26440,7 +26440,7 @@
                 <a:cs typeface="Calibri"/>
                 <a:sym typeface="Calibri"/>
               </a:rPr>
-              <a:t>Linear(784 → 512) + LeakyReLU(0.2)</a:t>
+              <a:t>Conv(1→64) + LeakyReLU(0.2)</a:t>
             </a:r>
             <a:endParaRPr b="1" i="0" sz="2000" u="none" cap="none" strike="noStrike">
               <a:solidFill>
@@ -26601,7 +26601,7 @@
                 <a:cs typeface="Calibri"/>
                 <a:sym typeface="Calibri"/>
               </a:rPr>
-              <a:t>Linear(512 → 256) + LeakyReLU(0.2)</a:t>
+              <a:t>Conv(64→128) + BN + LeakyReLU</a:t>
             </a:r>
             <a:endParaRPr b="1" i="0" sz="2000" u="none" cap="none" strike="noStrike">
               <a:solidFill>
@@ -26762,7 +26762,7 @@
                 <a:cs typeface="Calibri"/>
                 <a:sym typeface="Calibri"/>
               </a:rPr>
-              <a:t>Linear(256 → 128) + LeakyReLU(0.2)</a:t>
+              <a:t>Conv(128→256) + BN + LeakyReLU</a:t>
             </a:r>
             <a:endParaRPr b="1" i="0" sz="2000" u="none" cap="none" strike="noStrike">
               <a:solidFill>
@@ -26923,7 +26923,7 @@
                 <a:cs typeface="Calibri"/>
                 <a:sym typeface="Calibri"/>
               </a:rPr>
-              <a:t>Linear(128 → 1) + Sigmoid</a:t>
+              <a:t>Linear(2304→1) + Sigmoid</a:t>
             </a:r>
             <a:endParaRPr b="1" i="0" sz="2000" u="none" cap="none" strike="noStrike">
               <a:solidFill>
@@ -27216,7 +27216,7 @@
                 <a:cs typeface="Calibri"/>
                 <a:sym typeface="Calibri"/>
               </a:rPr>
-              <a:t>Discriminator parameters:  566,273</a:t>
+              <a:t>Discriminator parameters:  659,457</a:t>
             </a:r>
             <a:endParaRPr b="0" i="0" sz="2000" u="none" cap="none" strike="noStrike">
               <a:solidFill>

--- a/Presentation PPT/Presentation PPT.pptx
+++ b/Presentation PPT/Presentation PPT.pptx
@@ -5,7 +5,7 @@
     <p:sldMasterId id="2147483649" r:id="rId1"/>
   </p:sldMasterIdLst>
   <p:notesMasterIdLst>
-    <p:notesMasterId r:id="rId22"/>
+    <p:notesMasterId r:id="rId23"/>
   </p:notesMasterIdLst>
   <p:sldIdLst>
     <p:sldId id="256" r:id="rId2"/>
@@ -23,11 +23,12 @@
     <p:sldId id="268" r:id="rId14"/>
     <p:sldId id="269" r:id="rId15"/>
     <p:sldId id="270" r:id="rId16"/>
-    <p:sldId id="271" r:id="rId17"/>
-    <p:sldId id="272" r:id="rId18"/>
-    <p:sldId id="273" r:id="rId19"/>
-    <p:sldId id="274" r:id="rId20"/>
-    <p:sldId id="275" r:id="rId21"/>
+    <p:sldId id="276" r:id="rId17"/>
+    <p:sldId id="271" r:id="rId18"/>
+    <p:sldId id="272" r:id="rId19"/>
+    <p:sldId id="273" r:id="rId20"/>
+    <p:sldId id="274" r:id="rId21"/>
+    <p:sldId id="275" r:id="rId22"/>
   </p:sldIdLst>
   <p:sldSz cx="12192000" cy="6858000"/>
   <p:notesSz cx="6858000" cy="12192000"/>
@@ -260,6 +261,11 @@
       </a:defRPr>
     </a:lvl9pPr>
   </p:defaultTextStyle>
+  <p:extLst>
+    <p:ext uri="{EFAFB233-063F-42B5-8137-9DF3F51BA10A}">
+      <p15:sldGuideLst xmlns:p15="http://schemas.microsoft.com/office/powerpoint/2012/main"/>
+    </p:ext>
+  </p:extLst>
 </p:presentation>
 </file>
 
@@ -2635,7 +2641,7 @@
   <p:cSld>
     <p:spTree>
       <p:nvGrpSpPr>
-        <p:cNvPr id="1" name="Shape 325"/>
+        <p:cNvPr id="1" name="Shape 242"/>
         <p:cNvGrpSpPr/>
         <p:nvPr/>
       </p:nvGrpSpPr>
@@ -2649,7 +2655,7 @@
       </p:grpSpPr>
       <p:sp>
         <p:nvSpPr>
-          <p:cNvPr id="326" name="Google Shape;326;p16:notes"/>
+          <p:cNvPr id="243" name="Google Shape;243;p10:notes"/>
           <p:cNvSpPr>
             <a:spLocks noGrp="1" noRot="1" noChangeAspect="1"/>
           </p:cNvSpPr>
@@ -2700,7 +2706,7 @@
       </p:sp>
       <p:sp>
         <p:nvSpPr>
-          <p:cNvPr id="327" name="Google Shape;327;p16:notes"/>
+          <p:cNvPr id="244" name="Google Shape;244;p10:notes"/>
           <p:cNvSpPr txBox="1">
             <a:spLocks noGrp="1"/>
           </p:cNvSpPr>
@@ -2727,6 +2733,32 @@
           </a:bodyPr>
           <a:lstStyle/>
           <a:p>
+            <a:pPr marL="0" marR="0" lvl="0" indent="0" algn="l" defTabSz="914400" rtl="0" eaLnBrk="1" fontAlgn="auto" latinLnBrk="0" hangingPunct="1">
+              <a:lnSpc>
+                <a:spcPct val="100000"/>
+              </a:lnSpc>
+              <a:spcBef>
+                <a:spcPts val="0"/>
+              </a:spcBef>
+              <a:spcAft>
+                <a:spcPts val="0"/>
+              </a:spcAft>
+              <a:buClr>
+                <a:srgbClr val="000000"/>
+              </a:buClr>
+              <a:buSzPts val="1400"/>
+              <a:buFont typeface="Arial"/>
+              <a:buNone/>
+              <a:tabLst/>
+              <a:defRPr/>
+            </a:pPr>
+            <a:r>
+              <a:rPr lang="en-US" dirty="0" err="1"/>
+              <a:t>dia</a:t>
+            </a:r>
+            <a:endParaRPr lang="en-US" dirty="0"/>
+          </a:p>
+          <a:p>
             <a:pPr marL="0" lvl="0" indent="0" algn="l" rtl="0">
               <a:spcBef>
                 <a:spcPts val="0"/>
@@ -2742,7 +2774,7 @@
       </p:sp>
       <p:sp>
         <p:nvSpPr>
-          <p:cNvPr id="328" name="Google Shape;328;p16:notes"/>
+          <p:cNvPr id="245" name="Google Shape;245;p10:notes"/>
           <p:cNvSpPr txBox="1">
             <a:spLocks noGrp="1"/>
           </p:cNvSpPr>
@@ -2799,7 +2831,7 @@
   <p:cSld>
     <p:spTree>
       <p:nvGrpSpPr>
-        <p:cNvPr id="1" name="Shape 342"/>
+        <p:cNvPr id="1" name="Shape 325"/>
         <p:cNvGrpSpPr/>
         <p:nvPr/>
       </p:nvGrpSpPr>
@@ -2813,7 +2845,7 @@
       </p:grpSpPr>
       <p:sp>
         <p:nvSpPr>
-          <p:cNvPr id="343" name="Google Shape;343;p17:notes"/>
+          <p:cNvPr id="326" name="Google Shape;326;p16:notes"/>
           <p:cNvSpPr>
             <a:spLocks noGrp="1" noRot="1" noChangeAspect="1"/>
           </p:cNvSpPr>
@@ -2864,7 +2896,7 @@
       </p:sp>
       <p:sp>
         <p:nvSpPr>
-          <p:cNvPr id="344" name="Google Shape;344;p17:notes"/>
+          <p:cNvPr id="327" name="Google Shape;327;p16:notes"/>
           <p:cNvSpPr txBox="1">
             <a:spLocks noGrp="1"/>
           </p:cNvSpPr>
@@ -2891,32 +2923,6 @@
           </a:bodyPr>
           <a:lstStyle/>
           <a:p>
-            <a:pPr marL="0" marR="0" lvl="0" indent="0" algn="l" defTabSz="914400" rtl="0" eaLnBrk="1" fontAlgn="auto" latinLnBrk="0" hangingPunct="1">
-              <a:lnSpc>
-                <a:spcPct val="100000"/>
-              </a:lnSpc>
-              <a:spcBef>
-                <a:spcPts val="0"/>
-              </a:spcBef>
-              <a:spcAft>
-                <a:spcPts val="0"/>
-              </a:spcAft>
-              <a:buClr>
-                <a:srgbClr val="000000"/>
-              </a:buClr>
-              <a:buSzPts val="1400"/>
-              <a:buFont typeface="Arial"/>
-              <a:buNone/>
-              <a:tabLst/>
-              <a:defRPr/>
-            </a:pPr>
-            <a:r>
-              <a:rPr lang="en-US" dirty="0" err="1"/>
-              <a:t>dia</a:t>
-            </a:r>
-            <a:endParaRPr lang="en-US" dirty="0"/>
-          </a:p>
-          <a:p>
             <a:pPr marL="0" lvl="0" indent="0" algn="l" rtl="0">
               <a:spcBef>
                 <a:spcPts val="0"/>
@@ -2932,7 +2938,7 @@
       </p:sp>
       <p:sp>
         <p:nvSpPr>
-          <p:cNvPr id="345" name="Google Shape;345;p17:notes"/>
+          <p:cNvPr id="328" name="Google Shape;328;p16:notes"/>
           <p:cNvSpPr txBox="1">
             <a:spLocks noGrp="1"/>
           </p:cNvSpPr>
@@ -2989,7 +2995,7 @@
   <p:cSld>
     <p:spTree>
       <p:nvGrpSpPr>
-        <p:cNvPr id="1" name="Shape 362"/>
+        <p:cNvPr id="1" name="Shape 342"/>
         <p:cNvGrpSpPr/>
         <p:nvPr/>
       </p:nvGrpSpPr>
@@ -3003,7 +3009,7 @@
       </p:grpSpPr>
       <p:sp>
         <p:nvSpPr>
-          <p:cNvPr id="363" name="Google Shape;363;p18:notes"/>
+          <p:cNvPr id="343" name="Google Shape;343;p17:notes"/>
           <p:cNvSpPr>
             <a:spLocks noGrp="1" noRot="1" noChangeAspect="1"/>
           </p:cNvSpPr>
@@ -3054,7 +3060,7 @@
       </p:sp>
       <p:sp>
         <p:nvSpPr>
-          <p:cNvPr id="364" name="Google Shape;364;p18:notes"/>
+          <p:cNvPr id="344" name="Google Shape;344;p17:notes"/>
           <p:cNvSpPr txBox="1">
             <a:spLocks noGrp="1"/>
           </p:cNvSpPr>
@@ -3122,7 +3128,7 @@
       </p:sp>
       <p:sp>
         <p:nvSpPr>
-          <p:cNvPr id="365" name="Google Shape;365;p18:notes"/>
+          <p:cNvPr id="345" name="Google Shape;345;p17:notes"/>
           <p:cNvSpPr txBox="1">
             <a:spLocks noGrp="1"/>
           </p:cNvSpPr>
@@ -3179,7 +3185,7 @@
   <p:cSld>
     <p:spTree>
       <p:nvGrpSpPr>
-        <p:cNvPr id="1" name="Shape 396"/>
+        <p:cNvPr id="1" name="Shape 362"/>
         <p:cNvGrpSpPr/>
         <p:nvPr/>
       </p:nvGrpSpPr>
@@ -3193,7 +3199,7 @@
       </p:grpSpPr>
       <p:sp>
         <p:nvSpPr>
-          <p:cNvPr id="397" name="Google Shape;397;p19:notes"/>
+          <p:cNvPr id="363" name="Google Shape;363;p18:notes"/>
           <p:cNvSpPr>
             <a:spLocks noGrp="1" noRot="1" noChangeAspect="1"/>
           </p:cNvSpPr>
@@ -3244,7 +3250,7 @@
       </p:sp>
       <p:sp>
         <p:nvSpPr>
-          <p:cNvPr id="398" name="Google Shape;398;p19:notes"/>
+          <p:cNvPr id="364" name="Google Shape;364;p18:notes"/>
           <p:cNvSpPr txBox="1">
             <a:spLocks noGrp="1"/>
           </p:cNvSpPr>
@@ -3312,7 +3318,7 @@
       </p:sp>
       <p:sp>
         <p:nvSpPr>
-          <p:cNvPr id="399" name="Google Shape;399;p19:notes"/>
+          <p:cNvPr id="365" name="Google Shape;365;p18:notes"/>
           <p:cNvSpPr txBox="1">
             <a:spLocks noGrp="1"/>
           </p:cNvSpPr>
@@ -3537,7 +3543,7 @@
   <p:cSld>
     <p:spTree>
       <p:nvGrpSpPr>
-        <p:cNvPr id="1" name="Shape 420"/>
+        <p:cNvPr id="1" name="Shape 396"/>
         <p:cNvGrpSpPr/>
         <p:nvPr/>
       </p:nvGrpSpPr>
@@ -3551,7 +3557,7 @@
       </p:grpSpPr>
       <p:sp>
         <p:nvSpPr>
-          <p:cNvPr id="421" name="Google Shape;421;p20:notes"/>
+          <p:cNvPr id="397" name="Google Shape;397;p19:notes"/>
           <p:cNvSpPr>
             <a:spLocks noGrp="1" noRot="1" noChangeAspect="1"/>
           </p:cNvSpPr>
@@ -3602,6 +3608,196 @@
       </p:sp>
       <p:sp>
         <p:nvSpPr>
+          <p:cNvPr id="398" name="Google Shape;398;p19:notes"/>
+          <p:cNvSpPr txBox="1">
+            <a:spLocks noGrp="1"/>
+          </p:cNvSpPr>
+          <p:nvPr>
+            <p:ph type="body" idx="1"/>
+          </p:nvPr>
+        </p:nvSpPr>
+        <p:spPr>
+          <a:xfrm>
+            <a:off x="685800" y="4400550"/>
+            <a:ext cx="5486400" cy="3600450"/>
+          </a:xfrm>
+          <a:prstGeom prst="rect">
+            <a:avLst/>
+          </a:prstGeom>
+          <a:noFill/>
+          <a:ln>
+            <a:noFill/>
+          </a:ln>
+        </p:spPr>
+        <p:txBody>
+          <a:bodyPr spcFirstLastPara="1" wrap="square" lIns="91425" tIns="45700" rIns="91425" bIns="45700" anchor="t" anchorCtr="0">
+            <a:noAutofit/>
+          </a:bodyPr>
+          <a:lstStyle/>
+          <a:p>
+            <a:pPr marL="0" marR="0" lvl="0" indent="0" algn="l" defTabSz="914400" rtl="0" eaLnBrk="1" fontAlgn="auto" latinLnBrk="0" hangingPunct="1">
+              <a:lnSpc>
+                <a:spcPct val="100000"/>
+              </a:lnSpc>
+              <a:spcBef>
+                <a:spcPts val="0"/>
+              </a:spcBef>
+              <a:spcAft>
+                <a:spcPts val="0"/>
+              </a:spcAft>
+              <a:buClr>
+                <a:srgbClr val="000000"/>
+              </a:buClr>
+              <a:buSzPts val="1400"/>
+              <a:buFont typeface="Arial"/>
+              <a:buNone/>
+              <a:tabLst/>
+              <a:defRPr/>
+            </a:pPr>
+            <a:r>
+              <a:rPr lang="en-US" dirty="0" err="1"/>
+              <a:t>dia</a:t>
+            </a:r>
+            <a:endParaRPr lang="en-US" dirty="0"/>
+          </a:p>
+          <a:p>
+            <a:pPr marL="0" lvl="0" indent="0" algn="l" rtl="0">
+              <a:spcBef>
+                <a:spcPts val="0"/>
+              </a:spcBef>
+              <a:spcAft>
+                <a:spcPts val="0"/>
+              </a:spcAft>
+              <a:buNone/>
+            </a:pPr>
+            <a:endParaRPr dirty="0"/>
+          </a:p>
+        </p:txBody>
+      </p:sp>
+      <p:sp>
+        <p:nvSpPr>
+          <p:cNvPr id="399" name="Google Shape;399;p19:notes"/>
+          <p:cNvSpPr txBox="1">
+            <a:spLocks noGrp="1"/>
+          </p:cNvSpPr>
+          <p:nvPr>
+            <p:ph type="sldNum" idx="12"/>
+          </p:nvPr>
+        </p:nvSpPr>
+        <p:spPr>
+          <a:xfrm>
+            <a:off x="3884613" y="8685213"/>
+            <a:ext cx="2971800" cy="458787"/>
+          </a:xfrm>
+          <a:prstGeom prst="rect">
+            <a:avLst/>
+          </a:prstGeom>
+          <a:noFill/>
+          <a:ln>
+            <a:noFill/>
+          </a:ln>
+        </p:spPr>
+        <p:txBody>
+          <a:bodyPr spcFirstLastPara="1" wrap="square" lIns="91425" tIns="45700" rIns="91425" bIns="45700" anchor="b" anchorCtr="0">
+            <a:noAutofit/>
+          </a:bodyPr>
+          <a:lstStyle/>
+          <a:p>
+            <a:pPr marL="0" lvl="0" indent="0" algn="r" rtl="0">
+              <a:spcBef>
+                <a:spcPts val="0"/>
+              </a:spcBef>
+              <a:spcAft>
+                <a:spcPts val="0"/>
+              </a:spcAft>
+              <a:buNone/>
+            </a:pPr>
+            <a:fld id="{00000000-1234-1234-1234-123412341234}" type="slidenum">
+              <a:rPr lang="en-US"/>
+              <a:t>20</a:t>
+            </a:fld>
+            <a:endParaRPr/>
+          </a:p>
+        </p:txBody>
+      </p:sp>
+    </p:spTree>
+  </p:cSld>
+  <p:clrMapOvr>
+    <a:masterClrMapping/>
+  </p:clrMapOvr>
+</p:notes>
+</file>
+
+<file path=ppt/notesSlides/notesSlide21.xml><?xml version="1.0" encoding="utf-8"?>
+<p:notes xmlns:a="http://schemas.openxmlformats.org/drawingml/2006/main" xmlns:r="http://schemas.openxmlformats.org/officeDocument/2006/relationships" xmlns:p="http://schemas.openxmlformats.org/presentationml/2006/main" showMasterSp="0" showMasterPhAnim="0">
+  <p:cSld>
+    <p:spTree>
+      <p:nvGrpSpPr>
+        <p:cNvPr id="1" name="Shape 420"/>
+        <p:cNvGrpSpPr/>
+        <p:nvPr/>
+      </p:nvGrpSpPr>
+      <p:grpSpPr>
+        <a:xfrm>
+          <a:off x="0" y="0"/>
+          <a:ext cx="0" cy="0"/>
+          <a:chOff x="0" y="0"/>
+          <a:chExt cx="0" cy="0"/>
+        </a:xfrm>
+      </p:grpSpPr>
+      <p:sp>
+        <p:nvSpPr>
+          <p:cNvPr id="421" name="Google Shape;421;p20:notes"/>
+          <p:cNvSpPr>
+            <a:spLocks noGrp="1" noRot="1" noChangeAspect="1"/>
+          </p:cNvSpPr>
+          <p:nvPr>
+            <p:ph type="sldImg" idx="2"/>
+          </p:nvPr>
+        </p:nvSpPr>
+        <p:spPr>
+          <a:xfrm>
+            <a:off x="685800" y="1143000"/>
+            <a:ext cx="5486400" cy="3086100"/>
+          </a:xfrm>
+          <a:custGeom>
+            <a:avLst/>
+            <a:gdLst/>
+            <a:ahLst/>
+            <a:cxnLst/>
+            <a:rect l="l" t="t" r="r" b="b"/>
+            <a:pathLst>
+              <a:path w="120000" h="120000" extrusionOk="0">
+                <a:moveTo>
+                  <a:pt x="0" y="0"/>
+                </a:moveTo>
+                <a:lnTo>
+                  <a:pt x="120000" y="0"/>
+                </a:lnTo>
+                <a:lnTo>
+                  <a:pt x="120000" y="120000"/>
+                </a:lnTo>
+                <a:lnTo>
+                  <a:pt x="0" y="120000"/>
+                </a:lnTo>
+                <a:close/>
+              </a:path>
+            </a:pathLst>
+          </a:custGeom>
+          <a:noFill/>
+          <a:ln w="12700" cap="flat" cmpd="sng">
+            <a:solidFill>
+              <a:srgbClr val="000000"/>
+            </a:solidFill>
+            <a:prstDash val="solid"/>
+            <a:round/>
+            <a:headEnd type="none" w="sm" len="sm"/>
+            <a:tailEnd type="none" w="sm" len="sm"/>
+          </a:ln>
+        </p:spPr>
+      </p:sp>
+      <p:sp>
+        <p:nvSpPr>
           <p:cNvPr id="422" name="Google Shape;422;p20:notes"/>
           <p:cNvSpPr txBox="1">
             <a:spLocks noGrp="1"/>
@@ -3682,7 +3878,7 @@
             </a:pPr>
             <a:fld id="{00000000-1234-1234-1234-123412341234}" type="slidenum">
               <a:rPr lang="en-US"/>
-              <a:t>20</a:t>
+              <a:t>21</a:t>
             </a:fld>
             <a:endParaRPr/>
           </a:p>
@@ -11257,6 +11453,1752 @@
 <file path=ppt/slides/slide16.xml><?xml version="1.0" encoding="utf-8"?>
 <p:sld xmlns:a="http://schemas.openxmlformats.org/drawingml/2006/main" xmlns:r="http://schemas.openxmlformats.org/officeDocument/2006/relationships" xmlns:p="http://schemas.openxmlformats.org/presentationml/2006/main">
   <p:cSld>
+    <p:spTree>
+      <p:nvGrpSpPr>
+        <p:cNvPr id="1" name="Shape 246"/>
+        <p:cNvGrpSpPr/>
+        <p:nvPr/>
+      </p:nvGrpSpPr>
+      <p:grpSpPr>
+        <a:xfrm>
+          <a:off x="0" y="0"/>
+          <a:ext cx="0" cy="0"/>
+          <a:chOff x="0" y="0"/>
+          <a:chExt cx="0" cy="0"/>
+        </a:xfrm>
+      </p:grpSpPr>
+      <p:sp>
+        <p:nvSpPr>
+          <p:cNvPr id="247" name="Google Shape;247;p12"/>
+          <p:cNvSpPr txBox="1"/>
+          <p:nvPr/>
+        </p:nvSpPr>
+        <p:spPr>
+          <a:xfrm>
+            <a:off x="548640" y="457200"/>
+            <a:ext cx="9692640" cy="777240"/>
+          </a:xfrm>
+          <a:prstGeom prst="rect">
+            <a:avLst/>
+          </a:prstGeom>
+          <a:noFill/>
+          <a:ln>
+            <a:noFill/>
+          </a:ln>
+        </p:spPr>
+        <p:txBody>
+          <a:bodyPr spcFirstLastPara="1" wrap="square" lIns="0" tIns="0" rIns="0" bIns="0" anchor="t" anchorCtr="0">
+            <a:noAutofit/>
+          </a:bodyPr>
+          <a:lstStyle/>
+          <a:p>
+            <a:pPr marL="0" marR="0" lvl="0" indent="0" algn="l" rtl="0">
+              <a:spcBef>
+                <a:spcPts val="0"/>
+              </a:spcBef>
+              <a:spcAft>
+                <a:spcPts val="0"/>
+              </a:spcAft>
+              <a:buClr>
+                <a:srgbClr val="2E2E3A"/>
+              </a:buClr>
+              <a:buSzPts val="3000"/>
+              <a:buFont typeface="Cambria"/>
+              <a:buNone/>
+            </a:pPr>
+            <a:r>
+              <a:rPr lang="en-US" sz="4500" b="1" i="0" u="none" strike="noStrike" cap="none">
+                <a:solidFill>
+                  <a:srgbClr val="2E2E3A"/>
+                </a:solidFill>
+                <a:latin typeface="Cambria"/>
+                <a:ea typeface="Cambria"/>
+                <a:cs typeface="Cambria"/>
+                <a:sym typeface="Cambria"/>
+              </a:rPr>
+              <a:t>Quantitative Evaluation</a:t>
+            </a:r>
+            <a:endParaRPr sz="4500" b="0" i="0" u="none" strike="noStrike" cap="none">
+              <a:solidFill>
+                <a:schemeClr val="dk1"/>
+              </a:solidFill>
+              <a:latin typeface="Calibri"/>
+              <a:ea typeface="Calibri"/>
+              <a:cs typeface="Calibri"/>
+              <a:sym typeface="Calibri"/>
+            </a:endParaRPr>
+          </a:p>
+        </p:txBody>
+      </p:sp>
+      <p:sp>
+        <p:nvSpPr>
+          <p:cNvPr id="248" name="Google Shape;248;p12"/>
+          <p:cNvSpPr txBox="1"/>
+          <p:nvPr/>
+        </p:nvSpPr>
+        <p:spPr>
+          <a:xfrm>
+            <a:off x="566928" y="256032"/>
+            <a:ext cx="7315200" cy="274320"/>
+          </a:xfrm>
+          <a:prstGeom prst="rect">
+            <a:avLst/>
+          </a:prstGeom>
+          <a:noFill/>
+          <a:ln>
+            <a:noFill/>
+          </a:ln>
+        </p:spPr>
+        <p:txBody>
+          <a:bodyPr spcFirstLastPara="1" wrap="square" lIns="0" tIns="0" rIns="0" bIns="0" anchor="ctr" anchorCtr="0">
+            <a:noAutofit/>
+          </a:bodyPr>
+          <a:lstStyle/>
+          <a:p>
+            <a:pPr marL="0" marR="0" lvl="0" indent="0" algn="l" rtl="0">
+              <a:spcBef>
+                <a:spcPts val="0"/>
+              </a:spcBef>
+              <a:spcAft>
+                <a:spcPts val="0"/>
+              </a:spcAft>
+              <a:buClr>
+                <a:srgbClr val="6E6E82"/>
+              </a:buClr>
+              <a:buSzPts val="1150"/>
+              <a:buFont typeface="Calibri"/>
+              <a:buNone/>
+            </a:pPr>
+            <a:r>
+              <a:rPr lang="en-US" sz="2000" b="1" i="0" u="none" strike="noStrike" cap="none">
+                <a:solidFill>
+                  <a:srgbClr val="6E6E82"/>
+                </a:solidFill>
+                <a:latin typeface="Calibri"/>
+                <a:ea typeface="Calibri"/>
+                <a:cs typeface="Calibri"/>
+                <a:sym typeface="Calibri"/>
+              </a:rPr>
+              <a:t>08 · EVALUATION</a:t>
+            </a:r>
+            <a:endParaRPr sz="2000" b="0" i="0" u="none" strike="noStrike" cap="none">
+              <a:solidFill>
+                <a:schemeClr val="dk1"/>
+              </a:solidFill>
+              <a:latin typeface="Calibri"/>
+              <a:ea typeface="Calibri"/>
+              <a:cs typeface="Calibri"/>
+              <a:sym typeface="Calibri"/>
+            </a:endParaRPr>
+          </a:p>
+        </p:txBody>
+      </p:sp>
+      <p:graphicFrame>
+        <p:nvGraphicFramePr>
+          <p:cNvPr id="249" name="Google Shape;249;p12"/>
+          <p:cNvGraphicFramePr/>
+          <p:nvPr/>
+        </p:nvGraphicFramePr>
+        <p:xfrm>
+          <a:off x="548640" y="1691640"/>
+          <a:ext cx="5577850" cy="3200400"/>
+        </p:xfrm>
+        <a:graphic>
+          <a:graphicData uri="http://schemas.openxmlformats.org/drawingml/2006/table">
+            <a:tbl>
+              <a:tblPr>
+                <a:noFill/>
+                <a:tableStyleId>{B97020A8-79D1-4FB3-AEF3-38DB3644C332}</a:tableStyleId>
+              </a:tblPr>
+              <a:tblGrid>
+                <a:gridCol w="2103125">
+                  <a:extLst>
+                    <a:ext uri="{9D8B030D-6E8A-4147-A177-3AD203B41FA5}">
+                      <a16:colId xmlns:a16="http://schemas.microsoft.com/office/drawing/2014/main" val="20000"/>
+                    </a:ext>
+                  </a:extLst>
+                </a:gridCol>
+                <a:gridCol w="3474725">
+                  <a:extLst>
+                    <a:ext uri="{9D8B030D-6E8A-4147-A177-3AD203B41FA5}">
+                      <a16:colId xmlns:a16="http://schemas.microsoft.com/office/drawing/2014/main" val="20001"/>
+                    </a:ext>
+                  </a:extLst>
+                </a:gridCol>
+              </a:tblGrid>
+              <a:tr h="457200">
+                <a:tc>
+                  <a:txBody>
+                    <a:bodyPr/>
+                    <a:lstStyle/>
+                    <a:p>
+                      <a:pPr marL="0" marR="0" lvl="0" indent="0" algn="l" rtl="0">
+                        <a:spcBef>
+                          <a:spcPts val="0"/>
+                        </a:spcBef>
+                        <a:spcAft>
+                          <a:spcPts val="0"/>
+                        </a:spcAft>
+                        <a:buClr>
+                          <a:srgbClr val="FFFFFF"/>
+                        </a:buClr>
+                        <a:buSzPts val="1250"/>
+                        <a:buFont typeface="Calibri"/>
+                        <a:buNone/>
+                      </a:pPr>
+                      <a:r>
+                        <a:rPr lang="en-US" sz="1500" b="1" u="none" strike="noStrike" cap="none">
+                          <a:solidFill>
+                            <a:srgbClr val="FFFFFF"/>
+                          </a:solidFill>
+                          <a:latin typeface="Calibri"/>
+                          <a:ea typeface="Calibri"/>
+                          <a:cs typeface="Calibri"/>
+                          <a:sym typeface="Calibri"/>
+                        </a:rPr>
+                        <a:t>Metric</a:t>
+                      </a:r>
+                      <a:endParaRPr sz="1500" u="none" strike="noStrike" cap="none">
+                        <a:latin typeface="Calibri"/>
+                        <a:ea typeface="Calibri"/>
+                        <a:cs typeface="Calibri"/>
+                        <a:sym typeface="Calibri"/>
+                      </a:endParaRPr>
+                    </a:p>
+                  </a:txBody>
+                  <a:tcPr marL="127000" marR="127000" marT="76200" marB="76200" anchor="ctr">
+                    <a:lnL w="9525" cap="flat" cmpd="sng">
+                      <a:solidFill>
+                        <a:srgbClr val="E4E4EF"/>
+                      </a:solidFill>
+                      <a:prstDash val="solid"/>
+                      <a:round/>
+                      <a:headEnd type="none" w="sm" len="sm"/>
+                      <a:tailEnd type="none" w="sm" len="sm"/>
+                    </a:lnL>
+                    <a:lnR w="9525" cap="flat" cmpd="sng">
+                      <a:solidFill>
+                        <a:srgbClr val="E4E4EF"/>
+                      </a:solidFill>
+                      <a:prstDash val="solid"/>
+                      <a:round/>
+                      <a:headEnd type="none" w="sm" len="sm"/>
+                      <a:tailEnd type="none" w="sm" len="sm"/>
+                    </a:lnR>
+                    <a:lnT w="9525" cap="flat" cmpd="sng">
+                      <a:solidFill>
+                        <a:srgbClr val="E4E4EF"/>
+                      </a:solidFill>
+                      <a:prstDash val="solid"/>
+                      <a:round/>
+                      <a:headEnd type="none" w="sm" len="sm"/>
+                      <a:tailEnd type="none" w="sm" len="sm"/>
+                    </a:lnT>
+                    <a:lnB w="9525" cap="flat" cmpd="sng">
+                      <a:solidFill>
+                        <a:srgbClr val="E4E4EF"/>
+                      </a:solidFill>
+                      <a:prstDash val="solid"/>
+                      <a:round/>
+                      <a:headEnd type="none" w="sm" len="sm"/>
+                      <a:tailEnd type="none" w="sm" len="sm"/>
+                    </a:lnB>
+                    <a:solidFill>
+                      <a:srgbClr val="5D6FB0"/>
+                    </a:solidFill>
+                  </a:tcPr>
+                </a:tc>
+                <a:tc>
+                  <a:txBody>
+                    <a:bodyPr/>
+                    <a:lstStyle/>
+                    <a:p>
+                      <a:pPr marL="0" marR="0" lvl="0" indent="0" algn="l" rtl="0">
+                        <a:spcBef>
+                          <a:spcPts val="0"/>
+                        </a:spcBef>
+                        <a:spcAft>
+                          <a:spcPts val="0"/>
+                        </a:spcAft>
+                        <a:buClr>
+                          <a:srgbClr val="FFFFFF"/>
+                        </a:buClr>
+                        <a:buSzPts val="1250"/>
+                        <a:buFont typeface="Calibri"/>
+                        <a:buNone/>
+                      </a:pPr>
+                      <a:r>
+                        <a:rPr lang="en-US" sz="1500" b="1" u="none" strike="noStrike" cap="none">
+                          <a:solidFill>
+                            <a:srgbClr val="FFFFFF"/>
+                          </a:solidFill>
+                          <a:latin typeface="Calibri"/>
+                          <a:ea typeface="Calibri"/>
+                          <a:cs typeface="Calibri"/>
+                          <a:sym typeface="Calibri"/>
+                        </a:rPr>
+                        <a:t>Value</a:t>
+                      </a:r>
+                      <a:endParaRPr sz="1500" u="none" strike="noStrike" cap="none">
+                        <a:latin typeface="Calibri"/>
+                        <a:ea typeface="Calibri"/>
+                        <a:cs typeface="Calibri"/>
+                        <a:sym typeface="Calibri"/>
+                      </a:endParaRPr>
+                    </a:p>
+                  </a:txBody>
+                  <a:tcPr marL="127000" marR="127000" marT="76200" marB="76200" anchor="ctr">
+                    <a:lnL w="9525" cap="flat" cmpd="sng">
+                      <a:solidFill>
+                        <a:srgbClr val="E4E4EF"/>
+                      </a:solidFill>
+                      <a:prstDash val="solid"/>
+                      <a:round/>
+                      <a:headEnd type="none" w="sm" len="sm"/>
+                      <a:tailEnd type="none" w="sm" len="sm"/>
+                    </a:lnL>
+                    <a:lnR w="9525" cap="flat" cmpd="sng">
+                      <a:solidFill>
+                        <a:srgbClr val="E4E4EF"/>
+                      </a:solidFill>
+                      <a:prstDash val="solid"/>
+                      <a:round/>
+                      <a:headEnd type="none" w="sm" len="sm"/>
+                      <a:tailEnd type="none" w="sm" len="sm"/>
+                    </a:lnR>
+                    <a:lnT w="9525" cap="flat" cmpd="sng">
+                      <a:solidFill>
+                        <a:srgbClr val="E4E4EF"/>
+                      </a:solidFill>
+                      <a:prstDash val="solid"/>
+                      <a:round/>
+                      <a:headEnd type="none" w="sm" len="sm"/>
+                      <a:tailEnd type="none" w="sm" len="sm"/>
+                    </a:lnT>
+                    <a:lnB w="9525" cap="flat" cmpd="sng">
+                      <a:solidFill>
+                        <a:srgbClr val="E4E4EF"/>
+                      </a:solidFill>
+                      <a:prstDash val="solid"/>
+                      <a:round/>
+                      <a:headEnd type="none" w="sm" len="sm"/>
+                      <a:tailEnd type="none" w="sm" len="sm"/>
+                    </a:lnB>
+                    <a:solidFill>
+                      <a:srgbClr val="5D6FB0"/>
+                    </a:solidFill>
+                  </a:tcPr>
+                </a:tc>
+                <a:extLst>
+                  <a:ext uri="{0D108BD9-81ED-4DB2-BD59-A6C34878D82A}">
+                    <a16:rowId xmlns:a16="http://schemas.microsoft.com/office/drawing/2014/main" val="10000"/>
+                  </a:ext>
+                </a:extLst>
+              </a:tr>
+              <a:tr h="457200">
+                <a:tc>
+                  <a:txBody>
+                    <a:bodyPr/>
+                    <a:lstStyle/>
+                    <a:p>
+                      <a:pPr marL="0" marR="0" lvl="0" indent="0" algn="l" rtl="0">
+                        <a:spcBef>
+                          <a:spcPts val="0"/>
+                        </a:spcBef>
+                        <a:spcAft>
+                          <a:spcPts val="0"/>
+                        </a:spcAft>
+                        <a:buClr>
+                          <a:srgbClr val="2E2E3A"/>
+                        </a:buClr>
+                        <a:buSzPts val="1250"/>
+                        <a:buFont typeface="Calibri"/>
+                        <a:buNone/>
+                      </a:pPr>
+                      <a:r>
+                        <a:rPr lang="en-US" sz="1500" b="1" i="1" u="none" strike="noStrike" cap="none">
+                          <a:solidFill>
+                            <a:srgbClr val="2E2E3A"/>
+                          </a:solidFill>
+                          <a:latin typeface="Calibri"/>
+                          <a:ea typeface="Calibri"/>
+                          <a:cs typeface="Calibri"/>
+                          <a:sym typeface="Calibri"/>
+                        </a:rPr>
+                        <a:t>Accuracy</a:t>
+                      </a:r>
+                      <a:endParaRPr sz="1500" b="1" i="1" u="none" strike="noStrike" cap="none">
+                        <a:latin typeface="Calibri"/>
+                        <a:ea typeface="Calibri"/>
+                        <a:cs typeface="Calibri"/>
+                        <a:sym typeface="Calibri"/>
+                      </a:endParaRPr>
+                    </a:p>
+                  </a:txBody>
+                  <a:tcPr marL="127000" marR="127000" marT="76200" marB="76200" anchor="ctr">
+                    <a:lnL w="9525" cap="flat" cmpd="sng">
+                      <a:solidFill>
+                        <a:srgbClr val="E4E4EF"/>
+                      </a:solidFill>
+                      <a:prstDash val="solid"/>
+                      <a:round/>
+                      <a:headEnd type="none" w="sm" len="sm"/>
+                      <a:tailEnd type="none" w="sm" len="sm"/>
+                    </a:lnL>
+                    <a:lnR w="9525" cap="flat" cmpd="sng">
+                      <a:solidFill>
+                        <a:srgbClr val="E4E4EF"/>
+                      </a:solidFill>
+                      <a:prstDash val="solid"/>
+                      <a:round/>
+                      <a:headEnd type="none" w="sm" len="sm"/>
+                      <a:tailEnd type="none" w="sm" len="sm"/>
+                    </a:lnR>
+                    <a:lnT w="9525" cap="flat" cmpd="sng">
+                      <a:solidFill>
+                        <a:srgbClr val="E4E4EF"/>
+                      </a:solidFill>
+                      <a:prstDash val="solid"/>
+                      <a:round/>
+                      <a:headEnd type="none" w="sm" len="sm"/>
+                      <a:tailEnd type="none" w="sm" len="sm"/>
+                    </a:lnT>
+                    <a:lnB w="9525" cap="flat" cmpd="sng">
+                      <a:solidFill>
+                        <a:srgbClr val="E4E4EF"/>
+                      </a:solidFill>
+                      <a:prstDash val="solid"/>
+                      <a:round/>
+                      <a:headEnd type="none" w="sm" len="sm"/>
+                      <a:tailEnd type="none" w="sm" len="sm"/>
+                    </a:lnB>
+                    <a:solidFill>
+                      <a:srgbClr val="FFFFFF"/>
+                    </a:solidFill>
+                  </a:tcPr>
+                </a:tc>
+                <a:tc>
+                  <a:txBody>
+                    <a:bodyPr/>
+                    <a:lstStyle/>
+                    <a:p>
+                      <a:pPr marL="0" marR="0" lvl="0" indent="0" algn="l" rtl="0">
+                        <a:spcBef>
+                          <a:spcPts val="0"/>
+                        </a:spcBef>
+                        <a:spcAft>
+                          <a:spcPts val="0"/>
+                        </a:spcAft>
+                        <a:buClr>
+                          <a:srgbClr val="2E2E3A"/>
+                        </a:buClr>
+                        <a:buSzPts val="1250"/>
+                        <a:buFont typeface="Calibri"/>
+                        <a:buNone/>
+                      </a:pPr>
+                      <a:r>
+                        <a:rPr lang="en-US" sz="1500" i="1" u="none" strike="noStrike" cap="none">
+                          <a:solidFill>
+                            <a:srgbClr val="2E2E3A"/>
+                          </a:solidFill>
+                          <a:latin typeface="Calibri"/>
+                          <a:ea typeface="Calibri"/>
+                          <a:cs typeface="Calibri"/>
+                          <a:sym typeface="Calibri"/>
+                        </a:rPr>
+                        <a:t>0.669</a:t>
+                      </a:r>
+                      <a:endParaRPr sz="1500" i="1" u="none" strike="noStrike" cap="none">
+                        <a:latin typeface="Calibri"/>
+                        <a:ea typeface="Calibri"/>
+                        <a:cs typeface="Calibri"/>
+                        <a:sym typeface="Calibri"/>
+                      </a:endParaRPr>
+                    </a:p>
+                  </a:txBody>
+                  <a:tcPr marL="127000" marR="127000" marT="76200" marB="76200" anchor="ctr">
+                    <a:lnL w="9525" cap="flat" cmpd="sng">
+                      <a:solidFill>
+                        <a:srgbClr val="E4E4EF"/>
+                      </a:solidFill>
+                      <a:prstDash val="solid"/>
+                      <a:round/>
+                      <a:headEnd type="none" w="sm" len="sm"/>
+                      <a:tailEnd type="none" w="sm" len="sm"/>
+                    </a:lnL>
+                    <a:lnR w="9525" cap="flat" cmpd="sng">
+                      <a:solidFill>
+                        <a:srgbClr val="E4E4EF"/>
+                      </a:solidFill>
+                      <a:prstDash val="solid"/>
+                      <a:round/>
+                      <a:headEnd type="none" w="sm" len="sm"/>
+                      <a:tailEnd type="none" w="sm" len="sm"/>
+                    </a:lnR>
+                    <a:lnT w="9525" cap="flat" cmpd="sng">
+                      <a:solidFill>
+                        <a:srgbClr val="E4E4EF"/>
+                      </a:solidFill>
+                      <a:prstDash val="solid"/>
+                      <a:round/>
+                      <a:headEnd type="none" w="sm" len="sm"/>
+                      <a:tailEnd type="none" w="sm" len="sm"/>
+                    </a:lnT>
+                    <a:lnB w="9525" cap="flat" cmpd="sng">
+                      <a:solidFill>
+                        <a:srgbClr val="E4E4EF"/>
+                      </a:solidFill>
+                      <a:prstDash val="solid"/>
+                      <a:round/>
+                      <a:headEnd type="none" w="sm" len="sm"/>
+                      <a:tailEnd type="none" w="sm" len="sm"/>
+                    </a:lnB>
+                    <a:solidFill>
+                      <a:srgbClr val="FFFFFF"/>
+                    </a:solidFill>
+                  </a:tcPr>
+                </a:tc>
+                <a:extLst>
+                  <a:ext uri="{0D108BD9-81ED-4DB2-BD59-A6C34878D82A}">
+                    <a16:rowId xmlns:a16="http://schemas.microsoft.com/office/drawing/2014/main" val="10001"/>
+                  </a:ext>
+                </a:extLst>
+              </a:tr>
+              <a:tr h="457200">
+                <a:tc>
+                  <a:txBody>
+                    <a:bodyPr/>
+                    <a:lstStyle/>
+                    <a:p>
+                      <a:pPr marL="0" marR="0" lvl="0" indent="0" algn="l" rtl="0">
+                        <a:spcBef>
+                          <a:spcPts val="0"/>
+                        </a:spcBef>
+                        <a:spcAft>
+                          <a:spcPts val="0"/>
+                        </a:spcAft>
+                        <a:buClr>
+                          <a:srgbClr val="2E2E3A"/>
+                        </a:buClr>
+                        <a:buSzPts val="1250"/>
+                        <a:buFont typeface="Calibri"/>
+                        <a:buNone/>
+                      </a:pPr>
+                      <a:r>
+                        <a:rPr lang="en-US" sz="1500" b="1" i="1" u="none" strike="noStrike" cap="none">
+                          <a:solidFill>
+                            <a:srgbClr val="2E2E3A"/>
+                          </a:solidFill>
+                          <a:latin typeface="Calibri"/>
+                          <a:ea typeface="Calibri"/>
+                          <a:cs typeface="Calibri"/>
+                          <a:sym typeface="Calibri"/>
+                        </a:rPr>
+                        <a:t>Precision</a:t>
+                      </a:r>
+                      <a:endParaRPr sz="1500" b="1" i="1" u="none" strike="noStrike" cap="none">
+                        <a:latin typeface="Calibri"/>
+                        <a:ea typeface="Calibri"/>
+                        <a:cs typeface="Calibri"/>
+                        <a:sym typeface="Calibri"/>
+                      </a:endParaRPr>
+                    </a:p>
+                  </a:txBody>
+                  <a:tcPr marL="127000" marR="127000" marT="76200" marB="76200" anchor="ctr">
+                    <a:lnL w="9525" cap="flat" cmpd="sng">
+                      <a:solidFill>
+                        <a:srgbClr val="E4E4EF"/>
+                      </a:solidFill>
+                      <a:prstDash val="solid"/>
+                      <a:round/>
+                      <a:headEnd type="none" w="sm" len="sm"/>
+                      <a:tailEnd type="none" w="sm" len="sm"/>
+                    </a:lnL>
+                    <a:lnR w="9525" cap="flat" cmpd="sng">
+                      <a:solidFill>
+                        <a:srgbClr val="E4E4EF"/>
+                      </a:solidFill>
+                      <a:prstDash val="solid"/>
+                      <a:round/>
+                      <a:headEnd type="none" w="sm" len="sm"/>
+                      <a:tailEnd type="none" w="sm" len="sm"/>
+                    </a:lnR>
+                    <a:lnT w="9525" cap="flat" cmpd="sng">
+                      <a:solidFill>
+                        <a:srgbClr val="E4E4EF"/>
+                      </a:solidFill>
+                      <a:prstDash val="solid"/>
+                      <a:round/>
+                      <a:headEnd type="none" w="sm" len="sm"/>
+                      <a:tailEnd type="none" w="sm" len="sm"/>
+                    </a:lnT>
+                    <a:lnB w="9525" cap="flat" cmpd="sng">
+                      <a:solidFill>
+                        <a:srgbClr val="E4E4EF"/>
+                      </a:solidFill>
+                      <a:prstDash val="solid"/>
+                      <a:round/>
+                      <a:headEnd type="none" w="sm" len="sm"/>
+                      <a:tailEnd type="none" w="sm" len="sm"/>
+                    </a:lnB>
+                    <a:solidFill>
+                      <a:srgbClr val="F1F2FA"/>
+                    </a:solidFill>
+                  </a:tcPr>
+                </a:tc>
+                <a:tc>
+                  <a:txBody>
+                    <a:bodyPr/>
+                    <a:lstStyle/>
+                    <a:p>
+                      <a:pPr marL="0" marR="0" lvl="0" indent="0" algn="l" rtl="0">
+                        <a:spcBef>
+                          <a:spcPts val="0"/>
+                        </a:spcBef>
+                        <a:spcAft>
+                          <a:spcPts val="0"/>
+                        </a:spcAft>
+                        <a:buClr>
+                          <a:srgbClr val="2E2E3A"/>
+                        </a:buClr>
+                        <a:buSzPts val="1250"/>
+                        <a:buFont typeface="Calibri"/>
+                        <a:buNone/>
+                      </a:pPr>
+                      <a:r>
+                        <a:rPr lang="en-US" sz="1500" i="1" u="none" strike="noStrike" cap="none">
+                          <a:solidFill>
+                            <a:srgbClr val="2E2E3A"/>
+                          </a:solidFill>
+                          <a:latin typeface="Calibri"/>
+                          <a:ea typeface="Calibri"/>
+                          <a:cs typeface="Calibri"/>
+                          <a:sym typeface="Calibri"/>
+                        </a:rPr>
+                        <a:t>0.715</a:t>
+                      </a:r>
+                      <a:endParaRPr sz="1500" i="1" u="none" strike="noStrike" cap="none">
+                        <a:latin typeface="Calibri"/>
+                        <a:ea typeface="Calibri"/>
+                        <a:cs typeface="Calibri"/>
+                        <a:sym typeface="Calibri"/>
+                      </a:endParaRPr>
+                    </a:p>
+                  </a:txBody>
+                  <a:tcPr marL="127000" marR="127000" marT="76200" marB="76200" anchor="ctr">
+                    <a:lnL w="9525" cap="flat" cmpd="sng">
+                      <a:solidFill>
+                        <a:srgbClr val="E4E4EF"/>
+                      </a:solidFill>
+                      <a:prstDash val="solid"/>
+                      <a:round/>
+                      <a:headEnd type="none" w="sm" len="sm"/>
+                      <a:tailEnd type="none" w="sm" len="sm"/>
+                    </a:lnL>
+                    <a:lnR w="9525" cap="flat" cmpd="sng">
+                      <a:solidFill>
+                        <a:srgbClr val="E4E4EF"/>
+                      </a:solidFill>
+                      <a:prstDash val="solid"/>
+                      <a:round/>
+                      <a:headEnd type="none" w="sm" len="sm"/>
+                      <a:tailEnd type="none" w="sm" len="sm"/>
+                    </a:lnR>
+                    <a:lnT w="9525" cap="flat" cmpd="sng">
+                      <a:solidFill>
+                        <a:srgbClr val="E4E4EF"/>
+                      </a:solidFill>
+                      <a:prstDash val="solid"/>
+                      <a:round/>
+                      <a:headEnd type="none" w="sm" len="sm"/>
+                      <a:tailEnd type="none" w="sm" len="sm"/>
+                    </a:lnT>
+                    <a:lnB w="9525" cap="flat" cmpd="sng">
+                      <a:solidFill>
+                        <a:srgbClr val="E4E4EF"/>
+                      </a:solidFill>
+                      <a:prstDash val="solid"/>
+                      <a:round/>
+                      <a:headEnd type="none" w="sm" len="sm"/>
+                      <a:tailEnd type="none" w="sm" len="sm"/>
+                    </a:lnB>
+                    <a:solidFill>
+                      <a:srgbClr val="F1F2FA"/>
+                    </a:solidFill>
+                  </a:tcPr>
+                </a:tc>
+                <a:extLst>
+                  <a:ext uri="{0D108BD9-81ED-4DB2-BD59-A6C34878D82A}">
+                    <a16:rowId xmlns:a16="http://schemas.microsoft.com/office/drawing/2014/main" val="10002"/>
+                  </a:ext>
+                </a:extLst>
+              </a:tr>
+              <a:tr h="457200">
+                <a:tc>
+                  <a:txBody>
+                    <a:bodyPr/>
+                    <a:lstStyle/>
+                    <a:p>
+                      <a:pPr marL="0" marR="0" lvl="0" indent="0" algn="l" rtl="0">
+                        <a:spcBef>
+                          <a:spcPts val="0"/>
+                        </a:spcBef>
+                        <a:spcAft>
+                          <a:spcPts val="0"/>
+                        </a:spcAft>
+                        <a:buClr>
+                          <a:srgbClr val="2E2E3A"/>
+                        </a:buClr>
+                        <a:buSzPts val="1250"/>
+                        <a:buFont typeface="Calibri"/>
+                        <a:buNone/>
+                      </a:pPr>
+                      <a:r>
+                        <a:rPr lang="en-US" sz="1500" b="1" i="1" u="none" strike="noStrike" cap="none">
+                          <a:solidFill>
+                            <a:srgbClr val="2E2E3A"/>
+                          </a:solidFill>
+                          <a:latin typeface="Calibri"/>
+                          <a:ea typeface="Calibri"/>
+                          <a:cs typeface="Calibri"/>
+                          <a:sym typeface="Calibri"/>
+                        </a:rPr>
+                        <a:t>Recall</a:t>
+                      </a:r>
+                      <a:endParaRPr sz="1500" b="1" i="1" u="none" strike="noStrike" cap="none">
+                        <a:latin typeface="Calibri"/>
+                        <a:ea typeface="Calibri"/>
+                        <a:cs typeface="Calibri"/>
+                        <a:sym typeface="Calibri"/>
+                      </a:endParaRPr>
+                    </a:p>
+                  </a:txBody>
+                  <a:tcPr marL="127000" marR="127000" marT="76200" marB="76200" anchor="ctr">
+                    <a:lnL w="9525" cap="flat" cmpd="sng">
+                      <a:solidFill>
+                        <a:srgbClr val="E4E4EF"/>
+                      </a:solidFill>
+                      <a:prstDash val="solid"/>
+                      <a:round/>
+                      <a:headEnd type="none" w="sm" len="sm"/>
+                      <a:tailEnd type="none" w="sm" len="sm"/>
+                    </a:lnL>
+                    <a:lnR w="9525" cap="flat" cmpd="sng">
+                      <a:solidFill>
+                        <a:srgbClr val="E4E4EF"/>
+                      </a:solidFill>
+                      <a:prstDash val="solid"/>
+                      <a:round/>
+                      <a:headEnd type="none" w="sm" len="sm"/>
+                      <a:tailEnd type="none" w="sm" len="sm"/>
+                    </a:lnR>
+                    <a:lnT w="9525" cap="flat" cmpd="sng">
+                      <a:solidFill>
+                        <a:srgbClr val="E4E4EF"/>
+                      </a:solidFill>
+                      <a:prstDash val="solid"/>
+                      <a:round/>
+                      <a:headEnd type="none" w="sm" len="sm"/>
+                      <a:tailEnd type="none" w="sm" len="sm"/>
+                    </a:lnT>
+                    <a:lnB w="9525" cap="flat" cmpd="sng">
+                      <a:solidFill>
+                        <a:srgbClr val="E4E4EF"/>
+                      </a:solidFill>
+                      <a:prstDash val="solid"/>
+                      <a:round/>
+                      <a:headEnd type="none" w="sm" len="sm"/>
+                      <a:tailEnd type="none" w="sm" len="sm"/>
+                    </a:lnB>
+                    <a:solidFill>
+                      <a:srgbClr val="FFFFFF"/>
+                    </a:solidFill>
+                  </a:tcPr>
+                </a:tc>
+                <a:tc>
+                  <a:txBody>
+                    <a:bodyPr/>
+                    <a:lstStyle/>
+                    <a:p>
+                      <a:pPr marL="0" marR="0" lvl="0" indent="0" algn="l" rtl="0">
+                        <a:spcBef>
+                          <a:spcPts val="0"/>
+                        </a:spcBef>
+                        <a:spcAft>
+                          <a:spcPts val="0"/>
+                        </a:spcAft>
+                        <a:buClr>
+                          <a:srgbClr val="2E2E3A"/>
+                        </a:buClr>
+                        <a:buSzPts val="1250"/>
+                        <a:buFont typeface="Calibri"/>
+                        <a:buNone/>
+                      </a:pPr>
+                      <a:r>
+                        <a:rPr lang="en-US" sz="1500" i="1" u="none" strike="noStrike" cap="none">
+                          <a:solidFill>
+                            <a:srgbClr val="2E2E3A"/>
+                          </a:solidFill>
+                          <a:latin typeface="Calibri"/>
+                          <a:ea typeface="Calibri"/>
+                          <a:cs typeface="Calibri"/>
+                          <a:sym typeface="Calibri"/>
+                        </a:rPr>
+                        <a:t>0.562</a:t>
+                      </a:r>
+                      <a:endParaRPr sz="1500" i="1" u="none" strike="noStrike" cap="none">
+                        <a:latin typeface="Calibri"/>
+                        <a:ea typeface="Calibri"/>
+                        <a:cs typeface="Calibri"/>
+                        <a:sym typeface="Calibri"/>
+                      </a:endParaRPr>
+                    </a:p>
+                  </a:txBody>
+                  <a:tcPr marL="127000" marR="127000" marT="76200" marB="76200" anchor="ctr">
+                    <a:lnL w="9525" cap="flat" cmpd="sng">
+                      <a:solidFill>
+                        <a:srgbClr val="E4E4EF"/>
+                      </a:solidFill>
+                      <a:prstDash val="solid"/>
+                      <a:round/>
+                      <a:headEnd type="none" w="sm" len="sm"/>
+                      <a:tailEnd type="none" w="sm" len="sm"/>
+                    </a:lnL>
+                    <a:lnR w="9525" cap="flat" cmpd="sng">
+                      <a:solidFill>
+                        <a:srgbClr val="E4E4EF"/>
+                      </a:solidFill>
+                      <a:prstDash val="solid"/>
+                      <a:round/>
+                      <a:headEnd type="none" w="sm" len="sm"/>
+                      <a:tailEnd type="none" w="sm" len="sm"/>
+                    </a:lnR>
+                    <a:lnT w="9525" cap="flat" cmpd="sng">
+                      <a:solidFill>
+                        <a:srgbClr val="E4E4EF"/>
+                      </a:solidFill>
+                      <a:prstDash val="solid"/>
+                      <a:round/>
+                      <a:headEnd type="none" w="sm" len="sm"/>
+                      <a:tailEnd type="none" w="sm" len="sm"/>
+                    </a:lnT>
+                    <a:lnB w="9525" cap="flat" cmpd="sng">
+                      <a:solidFill>
+                        <a:srgbClr val="E4E4EF"/>
+                      </a:solidFill>
+                      <a:prstDash val="solid"/>
+                      <a:round/>
+                      <a:headEnd type="none" w="sm" len="sm"/>
+                      <a:tailEnd type="none" w="sm" len="sm"/>
+                    </a:lnB>
+                    <a:solidFill>
+                      <a:srgbClr val="FFFFFF"/>
+                    </a:solidFill>
+                  </a:tcPr>
+                </a:tc>
+                <a:extLst>
+                  <a:ext uri="{0D108BD9-81ED-4DB2-BD59-A6C34878D82A}">
+                    <a16:rowId xmlns:a16="http://schemas.microsoft.com/office/drawing/2014/main" val="10003"/>
+                  </a:ext>
+                </a:extLst>
+              </a:tr>
+              <a:tr h="457200">
+                <a:tc>
+                  <a:txBody>
+                    <a:bodyPr/>
+                    <a:lstStyle/>
+                    <a:p>
+                      <a:pPr marL="0" marR="0" lvl="0" indent="0" algn="l" rtl="0">
+                        <a:spcBef>
+                          <a:spcPts val="0"/>
+                        </a:spcBef>
+                        <a:spcAft>
+                          <a:spcPts val="0"/>
+                        </a:spcAft>
+                        <a:buClr>
+                          <a:srgbClr val="2E2E3A"/>
+                        </a:buClr>
+                        <a:buSzPts val="1250"/>
+                        <a:buFont typeface="Calibri"/>
+                        <a:buNone/>
+                      </a:pPr>
+                      <a:r>
+                        <a:rPr lang="en-US" sz="1500" b="1" i="1" u="none" strike="noStrike" cap="none">
+                          <a:solidFill>
+                            <a:srgbClr val="2E2E3A"/>
+                          </a:solidFill>
+                          <a:latin typeface="Calibri"/>
+                          <a:ea typeface="Calibri"/>
+                          <a:cs typeface="Calibri"/>
+                          <a:sym typeface="Calibri"/>
+                        </a:rPr>
+                        <a:t>F1 score</a:t>
+                      </a:r>
+                      <a:endParaRPr sz="1500" b="1" i="1" u="none" strike="noStrike" cap="none">
+                        <a:latin typeface="Calibri"/>
+                        <a:ea typeface="Calibri"/>
+                        <a:cs typeface="Calibri"/>
+                        <a:sym typeface="Calibri"/>
+                      </a:endParaRPr>
+                    </a:p>
+                  </a:txBody>
+                  <a:tcPr marL="127000" marR="127000" marT="76200" marB="76200" anchor="ctr">
+                    <a:lnL w="9525" cap="flat" cmpd="sng">
+                      <a:solidFill>
+                        <a:srgbClr val="E4E4EF"/>
+                      </a:solidFill>
+                      <a:prstDash val="solid"/>
+                      <a:round/>
+                      <a:headEnd type="none" w="sm" len="sm"/>
+                      <a:tailEnd type="none" w="sm" len="sm"/>
+                    </a:lnL>
+                    <a:lnR w="9525" cap="flat" cmpd="sng">
+                      <a:solidFill>
+                        <a:srgbClr val="E4E4EF"/>
+                      </a:solidFill>
+                      <a:prstDash val="solid"/>
+                      <a:round/>
+                      <a:headEnd type="none" w="sm" len="sm"/>
+                      <a:tailEnd type="none" w="sm" len="sm"/>
+                    </a:lnR>
+                    <a:lnT w="9525" cap="flat" cmpd="sng">
+                      <a:solidFill>
+                        <a:srgbClr val="E4E4EF"/>
+                      </a:solidFill>
+                      <a:prstDash val="solid"/>
+                      <a:round/>
+                      <a:headEnd type="none" w="sm" len="sm"/>
+                      <a:tailEnd type="none" w="sm" len="sm"/>
+                    </a:lnT>
+                    <a:lnB w="9525" cap="flat" cmpd="sng">
+                      <a:solidFill>
+                        <a:srgbClr val="E4E4EF"/>
+                      </a:solidFill>
+                      <a:prstDash val="solid"/>
+                      <a:round/>
+                      <a:headEnd type="none" w="sm" len="sm"/>
+                      <a:tailEnd type="none" w="sm" len="sm"/>
+                    </a:lnB>
+                    <a:solidFill>
+                      <a:srgbClr val="F1F2FA"/>
+                    </a:solidFill>
+                  </a:tcPr>
+                </a:tc>
+                <a:tc>
+                  <a:txBody>
+                    <a:bodyPr/>
+                    <a:lstStyle/>
+                    <a:p>
+                      <a:pPr marL="0" marR="0" lvl="0" indent="0" algn="l" rtl="0">
+                        <a:spcBef>
+                          <a:spcPts val="0"/>
+                        </a:spcBef>
+                        <a:spcAft>
+                          <a:spcPts val="0"/>
+                        </a:spcAft>
+                        <a:buClr>
+                          <a:srgbClr val="2E2E3A"/>
+                        </a:buClr>
+                        <a:buSzPts val="1250"/>
+                        <a:buFont typeface="Calibri"/>
+                        <a:buNone/>
+                      </a:pPr>
+                      <a:r>
+                        <a:rPr lang="en-US" sz="1500" i="1" u="none" strike="noStrike" cap="none">
+                          <a:solidFill>
+                            <a:srgbClr val="2E2E3A"/>
+                          </a:solidFill>
+                          <a:latin typeface="Calibri"/>
+                          <a:ea typeface="Calibri"/>
+                          <a:cs typeface="Calibri"/>
+                          <a:sym typeface="Calibri"/>
+                        </a:rPr>
+                        <a:t>0.629</a:t>
+                      </a:r>
+                      <a:endParaRPr sz="1500" i="1" u="none" strike="noStrike" cap="none">
+                        <a:latin typeface="Calibri"/>
+                        <a:ea typeface="Calibri"/>
+                        <a:cs typeface="Calibri"/>
+                        <a:sym typeface="Calibri"/>
+                      </a:endParaRPr>
+                    </a:p>
+                  </a:txBody>
+                  <a:tcPr marL="127000" marR="127000" marT="76200" marB="76200" anchor="ctr">
+                    <a:lnL w="9525" cap="flat" cmpd="sng">
+                      <a:solidFill>
+                        <a:srgbClr val="E4E4EF"/>
+                      </a:solidFill>
+                      <a:prstDash val="solid"/>
+                      <a:round/>
+                      <a:headEnd type="none" w="sm" len="sm"/>
+                      <a:tailEnd type="none" w="sm" len="sm"/>
+                    </a:lnL>
+                    <a:lnR w="9525" cap="flat" cmpd="sng">
+                      <a:solidFill>
+                        <a:srgbClr val="E4E4EF"/>
+                      </a:solidFill>
+                      <a:prstDash val="solid"/>
+                      <a:round/>
+                      <a:headEnd type="none" w="sm" len="sm"/>
+                      <a:tailEnd type="none" w="sm" len="sm"/>
+                    </a:lnR>
+                    <a:lnT w="9525" cap="flat" cmpd="sng">
+                      <a:solidFill>
+                        <a:srgbClr val="E4E4EF"/>
+                      </a:solidFill>
+                      <a:prstDash val="solid"/>
+                      <a:round/>
+                      <a:headEnd type="none" w="sm" len="sm"/>
+                      <a:tailEnd type="none" w="sm" len="sm"/>
+                    </a:lnT>
+                    <a:lnB w="9525" cap="flat" cmpd="sng">
+                      <a:solidFill>
+                        <a:srgbClr val="E4E4EF"/>
+                      </a:solidFill>
+                      <a:prstDash val="solid"/>
+                      <a:round/>
+                      <a:headEnd type="none" w="sm" len="sm"/>
+                      <a:tailEnd type="none" w="sm" len="sm"/>
+                    </a:lnB>
+                    <a:solidFill>
+                      <a:srgbClr val="F1F2FA"/>
+                    </a:solidFill>
+                  </a:tcPr>
+                </a:tc>
+                <a:extLst>
+                  <a:ext uri="{0D108BD9-81ED-4DB2-BD59-A6C34878D82A}">
+                    <a16:rowId xmlns:a16="http://schemas.microsoft.com/office/drawing/2014/main" val="10004"/>
+                  </a:ext>
+                </a:extLst>
+              </a:tr>
+              <a:tr h="457200">
+                <a:tc>
+                  <a:txBody>
+                    <a:bodyPr/>
+                    <a:lstStyle/>
+                    <a:p>
+                      <a:pPr marL="0" marR="0" lvl="0" indent="0" algn="l" rtl="0">
+                        <a:spcBef>
+                          <a:spcPts val="0"/>
+                        </a:spcBef>
+                        <a:spcAft>
+                          <a:spcPts val="0"/>
+                        </a:spcAft>
+                        <a:buClr>
+                          <a:srgbClr val="2E2E3A"/>
+                        </a:buClr>
+                        <a:buSzPts val="1250"/>
+                        <a:buFont typeface="Calibri"/>
+                        <a:buNone/>
+                      </a:pPr>
+                      <a:r>
+                        <a:rPr lang="en-US" sz="1500" b="1" i="1" u="none" strike="noStrike" cap="none">
+                          <a:solidFill>
+                            <a:srgbClr val="2E2E3A"/>
+                          </a:solidFill>
+                          <a:latin typeface="Calibri"/>
+                          <a:ea typeface="Calibri"/>
+                          <a:cs typeface="Calibri"/>
+                          <a:sym typeface="Calibri"/>
+                        </a:rPr>
+                        <a:t>Fakes that fooled D</a:t>
+                      </a:r>
+                      <a:endParaRPr sz="1500" b="1" i="1" u="none" strike="noStrike" cap="none">
+                        <a:latin typeface="Calibri"/>
+                        <a:ea typeface="Calibri"/>
+                        <a:cs typeface="Calibri"/>
+                        <a:sym typeface="Calibri"/>
+                      </a:endParaRPr>
+                    </a:p>
+                  </a:txBody>
+                  <a:tcPr marL="127000" marR="127000" marT="76200" marB="76200" anchor="ctr">
+                    <a:lnL w="9525" cap="flat" cmpd="sng">
+                      <a:solidFill>
+                        <a:srgbClr val="E4E4EF"/>
+                      </a:solidFill>
+                      <a:prstDash val="solid"/>
+                      <a:round/>
+                      <a:headEnd type="none" w="sm" len="sm"/>
+                      <a:tailEnd type="none" w="sm" len="sm"/>
+                    </a:lnL>
+                    <a:lnR w="9525" cap="flat" cmpd="sng">
+                      <a:solidFill>
+                        <a:srgbClr val="E4E4EF"/>
+                      </a:solidFill>
+                      <a:prstDash val="solid"/>
+                      <a:round/>
+                      <a:headEnd type="none" w="sm" len="sm"/>
+                      <a:tailEnd type="none" w="sm" len="sm"/>
+                    </a:lnR>
+                    <a:lnT w="9525" cap="flat" cmpd="sng">
+                      <a:solidFill>
+                        <a:srgbClr val="E4E4EF"/>
+                      </a:solidFill>
+                      <a:prstDash val="solid"/>
+                      <a:round/>
+                      <a:headEnd type="none" w="sm" len="sm"/>
+                      <a:tailEnd type="none" w="sm" len="sm"/>
+                    </a:lnT>
+                    <a:lnB w="9525" cap="flat" cmpd="sng">
+                      <a:solidFill>
+                        <a:srgbClr val="E4E4EF"/>
+                      </a:solidFill>
+                      <a:prstDash val="solid"/>
+                      <a:round/>
+                      <a:headEnd type="none" w="sm" len="sm"/>
+                      <a:tailEnd type="none" w="sm" len="sm"/>
+                    </a:lnB>
+                    <a:solidFill>
+                      <a:srgbClr val="FFFFFF"/>
+                    </a:solidFill>
+                  </a:tcPr>
+                </a:tc>
+                <a:tc>
+                  <a:txBody>
+                    <a:bodyPr/>
+                    <a:lstStyle/>
+                    <a:p>
+                      <a:pPr marL="0" marR="0" lvl="0" indent="0" algn="l" rtl="0">
+                        <a:spcBef>
+                          <a:spcPts val="0"/>
+                        </a:spcBef>
+                        <a:spcAft>
+                          <a:spcPts val="0"/>
+                        </a:spcAft>
+                        <a:buClr>
+                          <a:srgbClr val="2E2E3A"/>
+                        </a:buClr>
+                        <a:buSzPts val="1250"/>
+                        <a:buFont typeface="Calibri"/>
+                        <a:buNone/>
+                      </a:pPr>
+                      <a:r>
+                        <a:rPr lang="en-US" sz="1500" i="1" u="none" strike="noStrike" cap="none">
+                          <a:solidFill>
+                            <a:srgbClr val="2E2E3A"/>
+                          </a:solidFill>
+                          <a:latin typeface="Calibri"/>
+                          <a:ea typeface="Calibri"/>
+                          <a:cs typeface="Calibri"/>
+                          <a:sym typeface="Calibri"/>
+                        </a:rPr>
+                        <a:t>22.4%</a:t>
+                      </a:r>
+                      <a:endParaRPr sz="1500" i="1" u="none" strike="noStrike" cap="none">
+                        <a:latin typeface="Calibri"/>
+                        <a:ea typeface="Calibri"/>
+                        <a:cs typeface="Calibri"/>
+                        <a:sym typeface="Calibri"/>
+                      </a:endParaRPr>
+                    </a:p>
+                  </a:txBody>
+                  <a:tcPr marL="127000" marR="127000" marT="76200" marB="76200" anchor="ctr">
+                    <a:lnL w="9525" cap="flat" cmpd="sng">
+                      <a:solidFill>
+                        <a:srgbClr val="E4E4EF"/>
+                      </a:solidFill>
+                      <a:prstDash val="solid"/>
+                      <a:round/>
+                      <a:headEnd type="none" w="sm" len="sm"/>
+                      <a:tailEnd type="none" w="sm" len="sm"/>
+                    </a:lnL>
+                    <a:lnR w="9525" cap="flat" cmpd="sng">
+                      <a:solidFill>
+                        <a:srgbClr val="E4E4EF"/>
+                      </a:solidFill>
+                      <a:prstDash val="solid"/>
+                      <a:round/>
+                      <a:headEnd type="none" w="sm" len="sm"/>
+                      <a:tailEnd type="none" w="sm" len="sm"/>
+                    </a:lnR>
+                    <a:lnT w="9525" cap="flat" cmpd="sng">
+                      <a:solidFill>
+                        <a:srgbClr val="E4E4EF"/>
+                      </a:solidFill>
+                      <a:prstDash val="solid"/>
+                      <a:round/>
+                      <a:headEnd type="none" w="sm" len="sm"/>
+                      <a:tailEnd type="none" w="sm" len="sm"/>
+                    </a:lnT>
+                    <a:lnB w="9525" cap="flat" cmpd="sng">
+                      <a:solidFill>
+                        <a:srgbClr val="E4E4EF"/>
+                      </a:solidFill>
+                      <a:prstDash val="solid"/>
+                      <a:round/>
+                      <a:headEnd type="none" w="sm" len="sm"/>
+                      <a:tailEnd type="none" w="sm" len="sm"/>
+                    </a:lnB>
+                    <a:solidFill>
+                      <a:srgbClr val="FFFFFF"/>
+                    </a:solidFill>
+                  </a:tcPr>
+                </a:tc>
+                <a:extLst>
+                  <a:ext uri="{0D108BD9-81ED-4DB2-BD59-A6C34878D82A}">
+                    <a16:rowId xmlns:a16="http://schemas.microsoft.com/office/drawing/2014/main" val="10005"/>
+                  </a:ext>
+                </a:extLst>
+              </a:tr>
+              <a:tr h="457200">
+                <a:tc>
+                  <a:txBody>
+                    <a:bodyPr/>
+                    <a:lstStyle/>
+                    <a:p>
+                      <a:pPr marL="0" marR="0" lvl="0" indent="0" algn="l" rtl="0">
+                        <a:spcBef>
+                          <a:spcPts val="0"/>
+                        </a:spcBef>
+                        <a:spcAft>
+                          <a:spcPts val="0"/>
+                        </a:spcAft>
+                        <a:buClr>
+                          <a:srgbClr val="2E2E3A"/>
+                        </a:buClr>
+                        <a:buSzPts val="1250"/>
+                        <a:buFont typeface="Calibri"/>
+                        <a:buNone/>
+                      </a:pPr>
+                      <a:r>
+                        <a:rPr lang="en-US" sz="1500" b="1" i="1" u="none" strike="noStrike" cap="none">
+                          <a:solidFill>
+                            <a:srgbClr val="2E2E3A"/>
+                          </a:solidFill>
+                          <a:latin typeface="Calibri"/>
+                          <a:ea typeface="Calibri"/>
+                          <a:cs typeface="Calibri"/>
+                          <a:sym typeface="Calibri"/>
+                        </a:rPr>
+                        <a:t>Evaluated on</a:t>
+                      </a:r>
+                      <a:endParaRPr sz="1500" b="1" i="1" u="none" strike="noStrike" cap="none">
+                        <a:latin typeface="Calibri"/>
+                        <a:ea typeface="Calibri"/>
+                        <a:cs typeface="Calibri"/>
+                        <a:sym typeface="Calibri"/>
+                      </a:endParaRPr>
+                    </a:p>
+                  </a:txBody>
+                  <a:tcPr marL="127000" marR="127000" marT="76200" marB="76200" anchor="ctr">
+                    <a:lnL w="9525" cap="flat" cmpd="sng">
+                      <a:solidFill>
+                        <a:srgbClr val="E4E4EF"/>
+                      </a:solidFill>
+                      <a:prstDash val="solid"/>
+                      <a:round/>
+                      <a:headEnd type="none" w="sm" len="sm"/>
+                      <a:tailEnd type="none" w="sm" len="sm"/>
+                    </a:lnL>
+                    <a:lnR w="9525" cap="flat" cmpd="sng">
+                      <a:solidFill>
+                        <a:srgbClr val="E4E4EF"/>
+                      </a:solidFill>
+                      <a:prstDash val="solid"/>
+                      <a:round/>
+                      <a:headEnd type="none" w="sm" len="sm"/>
+                      <a:tailEnd type="none" w="sm" len="sm"/>
+                    </a:lnR>
+                    <a:lnT w="9525" cap="flat" cmpd="sng">
+                      <a:solidFill>
+                        <a:srgbClr val="E4E4EF"/>
+                      </a:solidFill>
+                      <a:prstDash val="solid"/>
+                      <a:round/>
+                      <a:headEnd type="none" w="sm" len="sm"/>
+                      <a:tailEnd type="none" w="sm" len="sm"/>
+                    </a:lnT>
+                    <a:lnB w="9525" cap="flat" cmpd="sng">
+                      <a:solidFill>
+                        <a:srgbClr val="E4E4EF"/>
+                      </a:solidFill>
+                      <a:prstDash val="solid"/>
+                      <a:round/>
+                      <a:headEnd type="none" w="sm" len="sm"/>
+                      <a:tailEnd type="none" w="sm" len="sm"/>
+                    </a:lnB>
+                    <a:solidFill>
+                      <a:srgbClr val="F1F2FA"/>
+                    </a:solidFill>
+                  </a:tcPr>
+                </a:tc>
+                <a:tc>
+                  <a:txBody>
+                    <a:bodyPr/>
+                    <a:lstStyle/>
+                    <a:p>
+                      <a:pPr marL="0" marR="0" lvl="0" indent="0" algn="l" rtl="0">
+                        <a:spcBef>
+                          <a:spcPts val="0"/>
+                        </a:spcBef>
+                        <a:spcAft>
+                          <a:spcPts val="0"/>
+                        </a:spcAft>
+                        <a:buClr>
+                          <a:srgbClr val="2E2E3A"/>
+                        </a:buClr>
+                        <a:buSzPts val="1250"/>
+                        <a:buFont typeface="Calibri"/>
+                        <a:buNone/>
+                      </a:pPr>
+                      <a:r>
+                        <a:rPr lang="en-US" sz="1500" i="1" u="none" strike="noStrike" cap="none">
+                          <a:solidFill>
+                            <a:srgbClr val="2E2E3A"/>
+                          </a:solidFill>
+                          <a:latin typeface="Calibri"/>
+                          <a:ea typeface="Calibri"/>
+                          <a:cs typeface="Calibri"/>
+                          <a:sym typeface="Calibri"/>
+                        </a:rPr>
+                        <a:t>2,000 real + 2,000 fake, eval mode</a:t>
+                      </a:r>
+                      <a:endParaRPr sz="1500" i="1" u="none" strike="noStrike" cap="none">
+                        <a:latin typeface="Calibri"/>
+                        <a:ea typeface="Calibri"/>
+                        <a:cs typeface="Calibri"/>
+                        <a:sym typeface="Calibri"/>
+                      </a:endParaRPr>
+                    </a:p>
+                  </a:txBody>
+                  <a:tcPr marL="127000" marR="127000" marT="76200" marB="76200" anchor="ctr">
+                    <a:lnL w="9525" cap="flat" cmpd="sng">
+                      <a:solidFill>
+                        <a:srgbClr val="E4E4EF"/>
+                      </a:solidFill>
+                      <a:prstDash val="solid"/>
+                      <a:round/>
+                      <a:headEnd type="none" w="sm" len="sm"/>
+                      <a:tailEnd type="none" w="sm" len="sm"/>
+                    </a:lnL>
+                    <a:lnR w="9525" cap="flat" cmpd="sng">
+                      <a:solidFill>
+                        <a:srgbClr val="E4E4EF"/>
+                      </a:solidFill>
+                      <a:prstDash val="solid"/>
+                      <a:round/>
+                      <a:headEnd type="none" w="sm" len="sm"/>
+                      <a:tailEnd type="none" w="sm" len="sm"/>
+                    </a:lnR>
+                    <a:lnT w="9525" cap="flat" cmpd="sng">
+                      <a:solidFill>
+                        <a:srgbClr val="E4E4EF"/>
+                      </a:solidFill>
+                      <a:prstDash val="solid"/>
+                      <a:round/>
+                      <a:headEnd type="none" w="sm" len="sm"/>
+                      <a:tailEnd type="none" w="sm" len="sm"/>
+                    </a:lnT>
+                    <a:lnB w="9525" cap="flat" cmpd="sng">
+                      <a:solidFill>
+                        <a:srgbClr val="E4E4EF"/>
+                      </a:solidFill>
+                      <a:prstDash val="solid"/>
+                      <a:round/>
+                      <a:headEnd type="none" w="sm" len="sm"/>
+                      <a:tailEnd type="none" w="sm" len="sm"/>
+                    </a:lnB>
+                    <a:solidFill>
+                      <a:srgbClr val="F1F2FA"/>
+                    </a:solidFill>
+                  </a:tcPr>
+                </a:tc>
+                <a:extLst>
+                  <a:ext uri="{0D108BD9-81ED-4DB2-BD59-A6C34878D82A}">
+                    <a16:rowId xmlns:a16="http://schemas.microsoft.com/office/drawing/2014/main" val="10006"/>
+                  </a:ext>
+                </a:extLst>
+              </a:tr>
+            </a:tbl>
+          </a:graphicData>
+        </a:graphic>
+      </p:graphicFrame>
+      <p:sp>
+        <p:nvSpPr>
+          <p:cNvPr id="250" name="Google Shape;250;p12"/>
+          <p:cNvSpPr txBox="1"/>
+          <p:nvPr/>
+        </p:nvSpPr>
+        <p:spPr>
+          <a:xfrm>
+            <a:off x="6446520" y="1691640"/>
+            <a:ext cx="5212080" cy="320040"/>
+          </a:xfrm>
+          <a:prstGeom prst="rect">
+            <a:avLst/>
+          </a:prstGeom>
+          <a:noFill/>
+          <a:ln>
+            <a:noFill/>
+          </a:ln>
+        </p:spPr>
+        <p:txBody>
+          <a:bodyPr spcFirstLastPara="1" wrap="square" lIns="0" tIns="0" rIns="0" bIns="0" anchor="ctr" anchorCtr="0">
+            <a:noAutofit/>
+          </a:bodyPr>
+          <a:lstStyle/>
+          <a:p>
+            <a:pPr marL="0" marR="0" lvl="0" indent="0" algn="l" rtl="0">
+              <a:spcBef>
+                <a:spcPts val="0"/>
+              </a:spcBef>
+              <a:spcAft>
+                <a:spcPts val="0"/>
+              </a:spcAft>
+              <a:buClr>
+                <a:srgbClr val="6E6E82"/>
+              </a:buClr>
+              <a:buSzPts val="1300"/>
+              <a:buFont typeface="Calibri"/>
+              <a:buNone/>
+            </a:pPr>
+            <a:r>
+              <a:rPr lang="en-US" sz="1500" b="1" i="0" u="none" strike="noStrike" cap="none">
+                <a:solidFill>
+                  <a:srgbClr val="6E6E82"/>
+                </a:solidFill>
+                <a:latin typeface="Calibri"/>
+                <a:ea typeface="Calibri"/>
+                <a:cs typeface="Calibri"/>
+                <a:sym typeface="Calibri"/>
+              </a:rPr>
+              <a:t>How to read these numbers</a:t>
+            </a:r>
+            <a:endParaRPr sz="1500" b="0" i="0" u="none" strike="noStrike" cap="none">
+              <a:solidFill>
+                <a:schemeClr val="dk1"/>
+              </a:solidFill>
+              <a:latin typeface="Calibri"/>
+              <a:ea typeface="Calibri"/>
+              <a:cs typeface="Calibri"/>
+              <a:sym typeface="Calibri"/>
+            </a:endParaRPr>
+          </a:p>
+        </p:txBody>
+      </p:sp>
+      <p:sp>
+        <p:nvSpPr>
+          <p:cNvPr id="251" name="Google Shape;251;p12"/>
+          <p:cNvSpPr txBox="1"/>
+          <p:nvPr/>
+        </p:nvSpPr>
+        <p:spPr>
+          <a:xfrm>
+            <a:off x="6446520" y="2103120"/>
+            <a:ext cx="5257800" cy="3931920"/>
+          </a:xfrm>
+          <a:prstGeom prst="rect">
+            <a:avLst/>
+          </a:prstGeom>
+          <a:noFill/>
+          <a:ln>
+            <a:noFill/>
+          </a:ln>
+        </p:spPr>
+        <p:txBody>
+          <a:bodyPr spcFirstLastPara="1" wrap="square" lIns="0" tIns="0" rIns="0" bIns="0" anchor="t" anchorCtr="0">
+            <a:noAutofit/>
+          </a:bodyPr>
+          <a:lstStyle/>
+          <a:p>
+            <a:pPr marL="177800" marR="0" lvl="0" indent="-219075" algn="l" rtl="0">
+              <a:lnSpc>
+                <a:spcPct val="108000"/>
+              </a:lnSpc>
+              <a:spcBef>
+                <a:spcPts val="0"/>
+              </a:spcBef>
+              <a:spcAft>
+                <a:spcPts val="0"/>
+              </a:spcAft>
+              <a:buClr>
+                <a:srgbClr val="2E2E3A"/>
+              </a:buClr>
+              <a:buSzPts val="2000"/>
+              <a:buFont typeface="Calibri"/>
+              <a:buChar char="●"/>
+            </a:pPr>
+            <a:r>
+              <a:rPr lang="en-US" sz="2000" b="0" i="1" u="none" strike="noStrike" cap="none">
+                <a:solidFill>
+                  <a:srgbClr val="2E2E3A"/>
+                </a:solidFill>
+                <a:latin typeface="Calibri"/>
+                <a:ea typeface="Calibri"/>
+                <a:cs typeface="Calibri"/>
+                <a:sym typeface="Calibri"/>
+              </a:rPr>
+              <a:t>The Discriminator is a binary classifier, so these metrics apply to it, not to the Generator.</a:t>
+            </a:r>
+            <a:endParaRPr sz="2000" b="0" i="1" u="none" strike="noStrike" cap="none">
+              <a:solidFill>
+                <a:schemeClr val="dk1"/>
+              </a:solidFill>
+              <a:latin typeface="Calibri"/>
+              <a:ea typeface="Calibri"/>
+              <a:cs typeface="Calibri"/>
+              <a:sym typeface="Calibri"/>
+            </a:endParaRPr>
+          </a:p>
+          <a:p>
+            <a:pPr marL="177800" marR="0" lvl="0" indent="-219075" algn="l" rtl="0">
+              <a:lnSpc>
+                <a:spcPct val="108000"/>
+              </a:lnSpc>
+              <a:spcBef>
+                <a:spcPts val="1400"/>
+              </a:spcBef>
+              <a:spcAft>
+                <a:spcPts val="0"/>
+              </a:spcAft>
+              <a:buClr>
+                <a:srgbClr val="2E2E3A"/>
+              </a:buClr>
+              <a:buSzPts val="2000"/>
+              <a:buFont typeface="Calibri"/>
+              <a:buChar char="●"/>
+            </a:pPr>
+            <a:r>
+              <a:rPr lang="en-US" sz="2000" b="0" i="1" u="none" strike="noStrike" cap="none">
+                <a:solidFill>
+                  <a:srgbClr val="2E2E3A"/>
+                </a:solidFill>
+                <a:latin typeface="Calibri"/>
+                <a:ea typeface="Calibri"/>
+                <a:cs typeface="Calibri"/>
+                <a:sym typeface="Calibri"/>
+              </a:rPr>
+              <a:t>The scoring is inverted: 100% accuracy would mean the Generator is failing, and 50% would mean it is perfect.</a:t>
+            </a:r>
+            <a:endParaRPr sz="2000" b="0" i="1" u="none" strike="noStrike" cap="none">
+              <a:solidFill>
+                <a:schemeClr val="dk1"/>
+              </a:solidFill>
+              <a:latin typeface="Calibri"/>
+              <a:ea typeface="Calibri"/>
+              <a:cs typeface="Calibri"/>
+              <a:sym typeface="Calibri"/>
+            </a:endParaRPr>
+          </a:p>
+          <a:p>
+            <a:pPr marL="177800" marR="0" lvl="0" indent="-219075" algn="l" rtl="0">
+              <a:lnSpc>
+                <a:spcPct val="108000"/>
+              </a:lnSpc>
+              <a:spcBef>
+                <a:spcPts val="1400"/>
+              </a:spcBef>
+              <a:spcAft>
+                <a:spcPts val="0"/>
+              </a:spcAft>
+              <a:buClr>
+                <a:srgbClr val="2E2E3A"/>
+              </a:buClr>
+              <a:buSzPts val="2000"/>
+              <a:buFont typeface="Calibri"/>
+              <a:buChar char="●"/>
+            </a:pPr>
+            <a:r>
+              <a:rPr lang="en-US" sz="2000" b="0" i="1" u="none" strike="noStrike" cap="none">
+                <a:solidFill>
+                  <a:srgbClr val="2E2E3A"/>
+                </a:solidFill>
+                <a:latin typeface="Calibri"/>
+                <a:ea typeface="Calibri"/>
+                <a:cs typeface="Calibri"/>
+                <a:sym typeface="Calibri"/>
+              </a:rPr>
+              <a:t>At 66.9%, roughly one generated digit in five slips past the 0.5 threshold undetected.</a:t>
+            </a:r>
+            <a:endParaRPr sz="2000" b="0" i="1" u="none" strike="noStrike" cap="none">
+              <a:solidFill>
+                <a:schemeClr val="dk1"/>
+              </a:solidFill>
+              <a:latin typeface="Calibri"/>
+              <a:ea typeface="Calibri"/>
+              <a:cs typeface="Calibri"/>
+              <a:sym typeface="Calibri"/>
+            </a:endParaRPr>
+          </a:p>
+          <a:p>
+            <a:pPr marL="177800" marR="0" lvl="0" indent="-219075" algn="l" rtl="0">
+              <a:lnSpc>
+                <a:spcPct val="108000"/>
+              </a:lnSpc>
+              <a:spcBef>
+                <a:spcPts val="1400"/>
+              </a:spcBef>
+              <a:spcAft>
+                <a:spcPts val="0"/>
+              </a:spcAft>
+              <a:buClr>
+                <a:srgbClr val="2E2E3A"/>
+              </a:buClr>
+              <a:buSzPts val="2000"/>
+              <a:buFont typeface="Calibri"/>
+              <a:buChar char="●"/>
+            </a:pPr>
+            <a:r>
+              <a:rPr lang="en-US" sz="2000" b="0" i="1" u="none" strike="noStrike" cap="none">
+                <a:solidFill>
+                  <a:srgbClr val="2E2E3A"/>
+                </a:solidFill>
+                <a:latin typeface="Calibri"/>
+                <a:ea typeface="Calibri"/>
+                <a:cs typeface="Calibri"/>
+                <a:sym typeface="Calibri"/>
+              </a:rPr>
+              <a:t>The Generator has no ground-truth label, so it is judged by FID and mode coverage instead.</a:t>
+            </a:r>
+            <a:endParaRPr sz="2000" b="0" i="1" u="none" strike="noStrike" cap="none">
+              <a:solidFill>
+                <a:schemeClr val="dk1"/>
+              </a:solidFill>
+              <a:latin typeface="Calibri"/>
+              <a:ea typeface="Calibri"/>
+              <a:cs typeface="Calibri"/>
+              <a:sym typeface="Calibri"/>
+            </a:endParaRPr>
+          </a:p>
+        </p:txBody>
+      </p:sp>
+      <p:sp>
+        <p:nvSpPr>
+          <p:cNvPr id="252" name="Google Shape;252;p12"/>
+          <p:cNvSpPr txBox="1"/>
+          <p:nvPr/>
+        </p:nvSpPr>
+        <p:spPr>
+          <a:xfrm>
+            <a:off x="548640" y="6492240"/>
+            <a:ext cx="7315200" cy="274320"/>
+          </a:xfrm>
+          <a:prstGeom prst="rect">
+            <a:avLst/>
+          </a:prstGeom>
+          <a:noFill/>
+          <a:ln>
+            <a:noFill/>
+          </a:ln>
+        </p:spPr>
+        <p:txBody>
+          <a:bodyPr spcFirstLastPara="1" wrap="square" lIns="0" tIns="0" rIns="0" bIns="0" anchor="ctr" anchorCtr="0">
+            <a:noAutofit/>
+          </a:bodyPr>
+          <a:lstStyle/>
+          <a:p>
+            <a:pPr marL="0" marR="0" lvl="0" indent="0" algn="l" rtl="0">
+              <a:spcBef>
+                <a:spcPts val="0"/>
+              </a:spcBef>
+              <a:spcAft>
+                <a:spcPts val="0"/>
+              </a:spcAft>
+              <a:buClr>
+                <a:srgbClr val="6E6E82"/>
+              </a:buClr>
+              <a:buSzPts val="900"/>
+              <a:buFont typeface="Calibri"/>
+              <a:buNone/>
+            </a:pPr>
+            <a:r>
+              <a:rPr lang="en-US" sz="900" b="0" i="0" u="none" strike="noStrike" cap="none">
+                <a:solidFill>
+                  <a:srgbClr val="6E6E82"/>
+                </a:solidFill>
+                <a:latin typeface="Calibri"/>
+                <a:ea typeface="Calibri"/>
+                <a:cs typeface="Calibri"/>
+                <a:sym typeface="Calibri"/>
+              </a:rPr>
+              <a:t>GAN-Based Handwritten Digit Generation</a:t>
+            </a:r>
+            <a:endParaRPr sz="900" b="0" i="0" u="none" strike="noStrike" cap="none">
+              <a:solidFill>
+                <a:schemeClr val="dk1"/>
+              </a:solidFill>
+              <a:latin typeface="Calibri"/>
+              <a:ea typeface="Calibri"/>
+              <a:cs typeface="Calibri"/>
+              <a:sym typeface="Calibri"/>
+            </a:endParaRPr>
+          </a:p>
+        </p:txBody>
+      </p:sp>
+      <p:sp>
+        <p:nvSpPr>
+          <p:cNvPr id="253" name="Google Shape;253;p12"/>
+          <p:cNvSpPr txBox="1"/>
+          <p:nvPr/>
+        </p:nvSpPr>
+        <p:spPr>
+          <a:xfrm>
+            <a:off x="11274552" y="6492240"/>
+            <a:ext cx="365760" cy="274320"/>
+          </a:xfrm>
+          <a:prstGeom prst="rect">
+            <a:avLst/>
+          </a:prstGeom>
+          <a:noFill/>
+          <a:ln>
+            <a:noFill/>
+          </a:ln>
+        </p:spPr>
+        <p:txBody>
+          <a:bodyPr spcFirstLastPara="1" wrap="square" lIns="0" tIns="0" rIns="0" bIns="0" anchor="ctr" anchorCtr="0">
+            <a:noAutofit/>
+          </a:bodyPr>
+          <a:lstStyle/>
+          <a:p>
+            <a:pPr marL="0" marR="0" lvl="0" indent="0" algn="r" rtl="0">
+              <a:spcBef>
+                <a:spcPts val="0"/>
+              </a:spcBef>
+              <a:spcAft>
+                <a:spcPts val="0"/>
+              </a:spcAft>
+              <a:buClr>
+                <a:srgbClr val="6E6E82"/>
+              </a:buClr>
+              <a:buSzPts val="900"/>
+              <a:buFont typeface="Calibri"/>
+              <a:buNone/>
+            </a:pPr>
+            <a:r>
+              <a:rPr lang="en-US" sz="900" b="0" i="0" u="none" strike="noStrike" cap="none">
+                <a:solidFill>
+                  <a:srgbClr val="6E6E82"/>
+                </a:solidFill>
+                <a:latin typeface="Calibri"/>
+                <a:ea typeface="Calibri"/>
+                <a:cs typeface="Calibri"/>
+                <a:sym typeface="Calibri"/>
+              </a:rPr>
+              <a:t>1</a:t>
+            </a:r>
+            <a:endParaRPr sz="900" b="0" i="0" u="none" strike="noStrike" cap="none">
+              <a:solidFill>
+                <a:schemeClr val="dk1"/>
+              </a:solidFill>
+              <a:latin typeface="Calibri"/>
+              <a:ea typeface="Calibri"/>
+              <a:cs typeface="Calibri"/>
+              <a:sym typeface="Calibri"/>
+            </a:endParaRPr>
+          </a:p>
+        </p:txBody>
+      </p:sp>
+    </p:spTree>
+  </p:cSld>
+  <p:clrMapOvr>
+    <a:masterClrMapping/>
+  </p:clrMapOvr>
+</p:sld>
+</file>
+
+<file path=ppt/slides/slide17.xml><?xml version="1.0" encoding="utf-8"?>
+<p:sld xmlns:a="http://schemas.openxmlformats.org/drawingml/2006/main" xmlns:r="http://schemas.openxmlformats.org/officeDocument/2006/relationships" xmlns:p="http://schemas.openxmlformats.org/presentationml/2006/main">
+  <p:cSld>
     <p:bg>
       <p:bgPr>
         <a:solidFill>
@@ -12175,7 +14117,7 @@
 </p:sld>
 </file>
 
-<file path=ppt/slides/slide17.xml><?xml version="1.0" encoding="utf-8"?>
+<file path=ppt/slides/slide18.xml><?xml version="1.0" encoding="utf-8"?>
 <p:sld xmlns:a="http://schemas.openxmlformats.org/drawingml/2006/main" xmlns:r="http://schemas.openxmlformats.org/officeDocument/2006/relationships" xmlns:p="http://schemas.openxmlformats.org/presentationml/2006/main">
   <p:cSld>
     <p:bg>
@@ -13079,7 +15021,7 @@
 </p:sld>
 </file>
 
-<file path=ppt/slides/slide18.xml><?xml version="1.0" encoding="utf-8"?>
+<file path=ppt/slides/slide19.xml><?xml version="1.0" encoding="utf-8"?>
 <p:sld xmlns:a="http://schemas.openxmlformats.org/drawingml/2006/main" xmlns:r="http://schemas.openxmlformats.org/officeDocument/2006/relationships" xmlns:p="http://schemas.openxmlformats.org/presentationml/2006/main">
   <p:cSld>
     <p:bg>
@@ -14763,1344 +16705,6 @@
                 <a:sym typeface="Calibri"/>
               </a:rPr>
               <a:t>18</a:t>
-            </a:r>
-            <a:endParaRPr sz="900" b="0" i="0" u="none" strike="noStrike" cap="none">
-              <a:solidFill>
-                <a:schemeClr val="dk1"/>
-              </a:solidFill>
-              <a:latin typeface="Calibri"/>
-              <a:ea typeface="Calibri"/>
-              <a:cs typeface="Calibri"/>
-              <a:sym typeface="Calibri"/>
-            </a:endParaRPr>
-          </a:p>
-        </p:txBody>
-      </p:sp>
-    </p:spTree>
-  </p:cSld>
-  <p:clrMapOvr>
-    <a:masterClrMapping/>
-  </p:clrMapOvr>
-</p:sld>
-</file>
-
-<file path=ppt/slides/slide19.xml><?xml version="1.0" encoding="utf-8"?>
-<p:sld xmlns:a="http://schemas.openxmlformats.org/drawingml/2006/main" xmlns:r="http://schemas.openxmlformats.org/officeDocument/2006/relationships" xmlns:p="http://schemas.openxmlformats.org/presentationml/2006/main">
-  <p:cSld>
-    <p:bg>
-      <p:bgPr>
-        <a:solidFill>
-          <a:srgbClr val="FAFAFC"/>
-        </a:solidFill>
-        <a:effectLst/>
-      </p:bgPr>
-    </p:bg>
-    <p:spTree>
-      <p:nvGrpSpPr>
-        <p:cNvPr id="1" name="Shape 400"/>
-        <p:cNvGrpSpPr/>
-        <p:nvPr/>
-      </p:nvGrpSpPr>
-      <p:grpSpPr>
-        <a:xfrm>
-          <a:off x="0" y="0"/>
-          <a:ext cx="0" cy="0"/>
-          <a:chOff x="0" y="0"/>
-          <a:chExt cx="0" cy="0"/>
-        </a:xfrm>
-      </p:grpSpPr>
-      <p:sp>
-        <p:nvSpPr>
-          <p:cNvPr id="401" name="Google Shape;401;p21"/>
-          <p:cNvSpPr txBox="1"/>
-          <p:nvPr/>
-        </p:nvSpPr>
-        <p:spPr>
-          <a:xfrm>
-            <a:off x="548640" y="457200"/>
-            <a:ext cx="9692640" cy="777240"/>
-          </a:xfrm>
-          <a:prstGeom prst="rect">
-            <a:avLst/>
-          </a:prstGeom>
-          <a:noFill/>
-          <a:ln>
-            <a:noFill/>
-          </a:ln>
-        </p:spPr>
-        <p:txBody>
-          <a:bodyPr spcFirstLastPara="1" wrap="square" lIns="0" tIns="0" rIns="0" bIns="0" anchor="t" anchorCtr="0">
-            <a:noAutofit/>
-          </a:bodyPr>
-          <a:lstStyle/>
-          <a:p>
-            <a:pPr marL="0" marR="0" lvl="0" indent="0" algn="l" rtl="0">
-              <a:spcBef>
-                <a:spcPts val="0"/>
-              </a:spcBef>
-              <a:spcAft>
-                <a:spcPts val="0"/>
-              </a:spcAft>
-              <a:buClr>
-                <a:srgbClr val="2E2E3A"/>
-              </a:buClr>
-              <a:buSzPts val="3000"/>
-              <a:buFont typeface="Cambria"/>
-              <a:buNone/>
-            </a:pPr>
-            <a:r>
-              <a:rPr lang="en-US" sz="4500" b="1" i="0" u="none" strike="noStrike" cap="none">
-                <a:solidFill>
-                  <a:srgbClr val="2E2E3A"/>
-                </a:solidFill>
-                <a:latin typeface="Cambria"/>
-                <a:ea typeface="Cambria"/>
-                <a:cs typeface="Cambria"/>
-                <a:sym typeface="Cambria"/>
-              </a:rPr>
-              <a:t>Individual Contributions</a:t>
-            </a:r>
-            <a:endParaRPr sz="4500" b="0" i="0" u="none" strike="noStrike" cap="none">
-              <a:solidFill>
-                <a:schemeClr val="dk1"/>
-              </a:solidFill>
-              <a:latin typeface="Calibri"/>
-              <a:ea typeface="Calibri"/>
-              <a:cs typeface="Calibri"/>
-              <a:sym typeface="Calibri"/>
-            </a:endParaRPr>
-          </a:p>
-        </p:txBody>
-      </p:sp>
-      <p:sp>
-        <p:nvSpPr>
-          <p:cNvPr id="402" name="Google Shape;402;p21"/>
-          <p:cNvSpPr txBox="1"/>
-          <p:nvPr/>
-        </p:nvSpPr>
-        <p:spPr>
-          <a:xfrm>
-            <a:off x="566928" y="256032"/>
-            <a:ext cx="7315200" cy="274320"/>
-          </a:xfrm>
-          <a:prstGeom prst="rect">
-            <a:avLst/>
-          </a:prstGeom>
-          <a:noFill/>
-          <a:ln>
-            <a:noFill/>
-          </a:ln>
-        </p:spPr>
-        <p:txBody>
-          <a:bodyPr spcFirstLastPara="1" wrap="square" lIns="0" tIns="0" rIns="0" bIns="0" anchor="ctr" anchorCtr="0">
-            <a:noAutofit/>
-          </a:bodyPr>
-          <a:lstStyle/>
-          <a:p>
-            <a:pPr marL="0" marR="0" lvl="0" indent="0" algn="l" rtl="0">
-              <a:spcBef>
-                <a:spcPts val="0"/>
-              </a:spcBef>
-              <a:spcAft>
-                <a:spcPts val="0"/>
-              </a:spcAft>
-              <a:buClr>
-                <a:srgbClr val="6E6E82"/>
-              </a:buClr>
-              <a:buSzPts val="1150"/>
-              <a:buFont typeface="Calibri"/>
-              <a:buNone/>
-            </a:pPr>
-            <a:r>
-              <a:rPr lang="en-US" sz="2000" b="1" i="0" u="none" strike="noStrike" cap="none">
-                <a:solidFill>
-                  <a:srgbClr val="6E6E82"/>
-                </a:solidFill>
-                <a:latin typeface="Calibri"/>
-                <a:ea typeface="Calibri"/>
-                <a:cs typeface="Calibri"/>
-                <a:sym typeface="Calibri"/>
-              </a:rPr>
-              <a:t>11 · TEAM</a:t>
-            </a:r>
-            <a:endParaRPr sz="2000" b="0" i="0" u="none" strike="noStrike" cap="none">
-              <a:solidFill>
-                <a:schemeClr val="dk1"/>
-              </a:solidFill>
-              <a:latin typeface="Calibri"/>
-              <a:ea typeface="Calibri"/>
-              <a:cs typeface="Calibri"/>
-              <a:sym typeface="Calibri"/>
-            </a:endParaRPr>
-          </a:p>
-        </p:txBody>
-      </p:sp>
-      <p:sp>
-        <p:nvSpPr>
-          <p:cNvPr id="403" name="Google Shape;403;p21"/>
-          <p:cNvSpPr/>
-          <p:nvPr/>
-        </p:nvSpPr>
-        <p:spPr>
-          <a:xfrm>
-            <a:off x="548640" y="1600200"/>
-            <a:ext cx="3538728" cy="4526280"/>
-          </a:xfrm>
-          <a:prstGeom prst="roundRect">
-            <a:avLst>
-              <a:gd name="adj" fmla="val 2584"/>
-            </a:avLst>
-          </a:prstGeom>
-          <a:solidFill>
-            <a:srgbClr val="FFFFFF"/>
-          </a:solidFill>
-          <a:ln>
-            <a:noFill/>
-          </a:ln>
-          <a:effectLst>
-            <a:outerShdw blurRad="114300" dist="25400" dir="5400000" algn="bl" rotWithShape="0">
-              <a:srgbClr val="3A3A55">
-                <a:alpha val="12941"/>
-              </a:srgbClr>
-            </a:outerShdw>
-          </a:effectLst>
-        </p:spPr>
-        <p:txBody>
-          <a:bodyPr spcFirstLastPara="1" wrap="square" lIns="91425" tIns="91425" rIns="91425" bIns="91425" anchor="ctr" anchorCtr="0">
-            <a:noAutofit/>
-          </a:bodyPr>
-          <a:lstStyle/>
-          <a:p>
-            <a:pPr marL="0" lvl="0" indent="0" algn="l" rtl="0">
-              <a:spcBef>
-                <a:spcPts val="0"/>
-              </a:spcBef>
-              <a:spcAft>
-                <a:spcPts val="0"/>
-              </a:spcAft>
-              <a:buNone/>
-            </a:pPr>
-            <a:endParaRPr/>
-          </a:p>
-        </p:txBody>
-      </p:sp>
-      <p:sp>
-        <p:nvSpPr>
-          <p:cNvPr id="404" name="Google Shape;404;p21"/>
-          <p:cNvSpPr/>
-          <p:nvPr/>
-        </p:nvSpPr>
-        <p:spPr>
-          <a:xfrm>
-            <a:off x="841248" y="1892808"/>
-            <a:ext cx="640200" cy="640200"/>
-          </a:xfrm>
-          <a:prstGeom prst="ellipse">
-            <a:avLst/>
-          </a:prstGeom>
-          <a:solidFill>
-            <a:srgbClr val="BFE3D0"/>
-          </a:solidFill>
-          <a:ln>
-            <a:noFill/>
-          </a:ln>
-        </p:spPr>
-        <p:txBody>
-          <a:bodyPr spcFirstLastPara="1" wrap="square" lIns="91425" tIns="91425" rIns="91425" bIns="91425" anchor="ctr" anchorCtr="0">
-            <a:noAutofit/>
-          </a:bodyPr>
-          <a:lstStyle/>
-          <a:p>
-            <a:pPr marL="0" lvl="0" indent="0" algn="l" rtl="0">
-              <a:spcBef>
-                <a:spcPts val="0"/>
-              </a:spcBef>
-              <a:spcAft>
-                <a:spcPts val="0"/>
-              </a:spcAft>
-              <a:buNone/>
-            </a:pPr>
-            <a:endParaRPr/>
-          </a:p>
-        </p:txBody>
-      </p:sp>
-      <p:pic>
-        <p:nvPicPr>
-          <p:cNvPr id="405" name="Google Shape;405;p21" descr="/tmp/gan_ppt/icons/users_dark.png"/>
-          <p:cNvPicPr preferRelativeResize="0"/>
-          <p:nvPr/>
-        </p:nvPicPr>
-        <p:blipFill rotWithShape="1">
-          <a:blip r:embed="rId3">
-            <a:alphaModFix/>
-          </a:blip>
-          <a:srcRect/>
-          <a:stretch/>
-        </p:blipFill>
-        <p:spPr>
-          <a:xfrm>
-            <a:off x="1005840" y="2057400"/>
-            <a:ext cx="310896" cy="310896"/>
-          </a:xfrm>
-          <a:prstGeom prst="rect">
-            <a:avLst/>
-          </a:prstGeom>
-          <a:noFill/>
-          <a:ln>
-            <a:noFill/>
-          </a:ln>
-        </p:spPr>
-      </p:pic>
-      <p:sp>
-        <p:nvSpPr>
-          <p:cNvPr id="406" name="Google Shape;406;p21"/>
-          <p:cNvSpPr txBox="1"/>
-          <p:nvPr/>
-        </p:nvSpPr>
-        <p:spPr>
-          <a:xfrm>
-            <a:off x="822960" y="2679192"/>
-            <a:ext cx="2990088" cy="685800"/>
-          </a:xfrm>
-          <a:prstGeom prst="rect">
-            <a:avLst/>
-          </a:prstGeom>
-          <a:noFill/>
-          <a:ln>
-            <a:noFill/>
-          </a:ln>
-        </p:spPr>
-        <p:txBody>
-          <a:bodyPr spcFirstLastPara="1" wrap="square" lIns="0" tIns="0" rIns="0" bIns="0" anchor="ctr" anchorCtr="0">
-            <a:noAutofit/>
-          </a:bodyPr>
-          <a:lstStyle/>
-          <a:p>
-            <a:pPr marL="0" marR="0" lvl="0" indent="0" algn="l" rtl="0">
-              <a:lnSpc>
-                <a:spcPct val="105000"/>
-              </a:lnSpc>
-              <a:spcBef>
-                <a:spcPts val="0"/>
-              </a:spcBef>
-              <a:spcAft>
-                <a:spcPts val="0"/>
-              </a:spcAft>
-              <a:buClr>
-                <a:srgbClr val="2E2E3A"/>
-              </a:buClr>
-              <a:buSzPts val="1700"/>
-              <a:buFont typeface="Cambria"/>
-              <a:buNone/>
-            </a:pPr>
-            <a:r>
-              <a:rPr lang="en-US" sz="1700" b="1" i="0" u="none" strike="noStrike" cap="none">
-                <a:solidFill>
-                  <a:srgbClr val="2E2E3A"/>
-                </a:solidFill>
-                <a:latin typeface="Cambria"/>
-                <a:ea typeface="Cambria"/>
-                <a:cs typeface="Cambria"/>
-                <a:sym typeface="Cambria"/>
-              </a:rPr>
-              <a:t>Amrith Saras</a:t>
-            </a:r>
-            <a:endParaRPr sz="1700" b="0" i="0" u="none" strike="noStrike" cap="none">
-              <a:solidFill>
-                <a:schemeClr val="dk1"/>
-              </a:solidFill>
-              <a:latin typeface="Calibri"/>
-              <a:ea typeface="Calibri"/>
-              <a:cs typeface="Calibri"/>
-              <a:sym typeface="Calibri"/>
-            </a:endParaRPr>
-          </a:p>
-        </p:txBody>
-      </p:sp>
-      <p:sp>
-        <p:nvSpPr>
-          <p:cNvPr id="407" name="Google Shape;407;p21"/>
-          <p:cNvSpPr txBox="1"/>
-          <p:nvPr/>
-        </p:nvSpPr>
-        <p:spPr>
-          <a:xfrm>
-            <a:off x="841248" y="3383280"/>
-            <a:ext cx="2953512" cy="2606040"/>
-          </a:xfrm>
-          <a:prstGeom prst="rect">
-            <a:avLst/>
-          </a:prstGeom>
-          <a:noFill/>
-          <a:ln>
-            <a:noFill/>
-          </a:ln>
-        </p:spPr>
-        <p:txBody>
-          <a:bodyPr spcFirstLastPara="1" wrap="square" lIns="0" tIns="0" rIns="0" bIns="0" anchor="t" anchorCtr="0">
-            <a:noAutofit/>
-          </a:bodyPr>
-          <a:lstStyle/>
-          <a:p>
-            <a:pPr marL="177800" marR="0" lvl="0" indent="-200025" algn="l" rtl="0">
-              <a:lnSpc>
-                <a:spcPct val="108000"/>
-              </a:lnSpc>
-              <a:spcBef>
-                <a:spcPts val="0"/>
-              </a:spcBef>
-              <a:spcAft>
-                <a:spcPts val="0"/>
-              </a:spcAft>
-              <a:buClr>
-                <a:srgbClr val="2E2E3A"/>
-              </a:buClr>
-              <a:buSzPts val="1500"/>
-              <a:buFont typeface="Calibri"/>
-              <a:buChar char="●"/>
-            </a:pPr>
-            <a:r>
-              <a:rPr lang="en-US" sz="1500" b="0" i="0" u="none" strike="noStrike" cap="none">
-                <a:solidFill>
-                  <a:srgbClr val="2E2E3A"/>
-                </a:solidFill>
-                <a:latin typeface="Calibri"/>
-                <a:ea typeface="Calibri"/>
-                <a:cs typeface="Calibri"/>
-                <a:sym typeface="Calibri"/>
-              </a:rPr>
-              <a:t>Designed and implemented the Generator architecture and full training loop.</a:t>
-            </a:r>
-            <a:endParaRPr sz="1500" b="0" i="0" u="none" strike="noStrike" cap="none">
-              <a:solidFill>
-                <a:schemeClr val="dk1"/>
-              </a:solidFill>
-              <a:latin typeface="Calibri"/>
-              <a:ea typeface="Calibri"/>
-              <a:cs typeface="Calibri"/>
-              <a:sym typeface="Calibri"/>
-            </a:endParaRPr>
-          </a:p>
-          <a:p>
-            <a:pPr marL="177800" marR="0" lvl="0" indent="-200025" algn="l" rtl="0">
-              <a:lnSpc>
-                <a:spcPct val="108000"/>
-              </a:lnSpc>
-              <a:spcBef>
-                <a:spcPts val="1200"/>
-              </a:spcBef>
-              <a:spcAft>
-                <a:spcPts val="0"/>
-              </a:spcAft>
-              <a:buClr>
-                <a:srgbClr val="2E2E3A"/>
-              </a:buClr>
-              <a:buSzPts val="1500"/>
-              <a:buFont typeface="Calibri"/>
-              <a:buChar char="●"/>
-            </a:pPr>
-            <a:r>
-              <a:rPr lang="en-US" sz="1500" b="0" i="0" u="none" strike="noStrike" cap="none">
-                <a:solidFill>
-                  <a:srgbClr val="2E2E3A"/>
-                </a:solidFill>
-                <a:latin typeface="Calibri"/>
-                <a:ea typeface="Calibri"/>
-                <a:cs typeface="Calibri"/>
-                <a:sym typeface="Calibri"/>
-              </a:rPr>
-              <a:t>Implemented the latent space interpolation experiment.</a:t>
-            </a:r>
-            <a:endParaRPr sz="1500" b="0" i="0" u="none" strike="noStrike" cap="none">
-              <a:solidFill>
-                <a:schemeClr val="dk1"/>
-              </a:solidFill>
-              <a:latin typeface="Calibri"/>
-              <a:ea typeface="Calibri"/>
-              <a:cs typeface="Calibri"/>
-              <a:sym typeface="Calibri"/>
-            </a:endParaRPr>
-          </a:p>
-          <a:p>
-            <a:pPr marL="177800" marR="0" lvl="0" indent="-200025" algn="l" rtl="0">
-              <a:lnSpc>
-                <a:spcPct val="108000"/>
-              </a:lnSpc>
-              <a:spcBef>
-                <a:spcPts val="1200"/>
-              </a:spcBef>
-              <a:spcAft>
-                <a:spcPts val="0"/>
-              </a:spcAft>
-              <a:buClr>
-                <a:srgbClr val="2E2E3A"/>
-              </a:buClr>
-              <a:buSzPts val="1500"/>
-              <a:buFont typeface="Calibri"/>
-              <a:buChar char="●"/>
-            </a:pPr>
-            <a:r>
-              <a:rPr lang="en-US" sz="1500" b="0" i="0" u="none" strike="noStrike" cap="none">
-                <a:solidFill>
-                  <a:srgbClr val="2E2E3A"/>
-                </a:solidFill>
-                <a:latin typeface="Calibri"/>
-                <a:ea typeface="Calibri"/>
-                <a:cs typeface="Calibri"/>
-                <a:sym typeface="Calibri"/>
-              </a:rPr>
-              <a:t>Set up the GPU training environment (CUDA PyTorch).</a:t>
-            </a:r>
-            <a:endParaRPr sz="1500" b="0" i="0" u="none" strike="noStrike" cap="none">
-              <a:solidFill>
-                <a:schemeClr val="dk1"/>
-              </a:solidFill>
-              <a:latin typeface="Calibri"/>
-              <a:ea typeface="Calibri"/>
-              <a:cs typeface="Calibri"/>
-              <a:sym typeface="Calibri"/>
-            </a:endParaRPr>
-          </a:p>
-          <a:p>
-            <a:pPr marL="0" marR="0" lvl="0" indent="0" algn="l" rtl="0">
-              <a:lnSpc>
-                <a:spcPct val="108000"/>
-              </a:lnSpc>
-              <a:spcBef>
-                <a:spcPts val="1200"/>
-              </a:spcBef>
-              <a:spcAft>
-                <a:spcPts val="0"/>
-              </a:spcAft>
-              <a:buNone/>
-            </a:pPr>
-            <a:endParaRPr sz="1500" b="0" i="0" u="none" strike="noStrike" cap="none">
-              <a:solidFill>
-                <a:schemeClr val="dk1"/>
-              </a:solidFill>
-              <a:latin typeface="Calibri"/>
-              <a:ea typeface="Calibri"/>
-              <a:cs typeface="Calibri"/>
-              <a:sym typeface="Calibri"/>
-            </a:endParaRPr>
-          </a:p>
-        </p:txBody>
-      </p:sp>
-      <p:sp>
-        <p:nvSpPr>
-          <p:cNvPr id="408" name="Google Shape;408;p21"/>
-          <p:cNvSpPr/>
-          <p:nvPr/>
-        </p:nvSpPr>
-        <p:spPr>
-          <a:xfrm>
-            <a:off x="4325112" y="1600200"/>
-            <a:ext cx="3538728" cy="4526280"/>
-          </a:xfrm>
-          <a:prstGeom prst="roundRect">
-            <a:avLst>
-              <a:gd name="adj" fmla="val 2584"/>
-            </a:avLst>
-          </a:prstGeom>
-          <a:solidFill>
-            <a:srgbClr val="FFFFFF"/>
-          </a:solidFill>
-          <a:ln>
-            <a:noFill/>
-          </a:ln>
-          <a:effectLst>
-            <a:outerShdw blurRad="114300" dist="25400" dir="5400000" algn="bl" rotWithShape="0">
-              <a:srgbClr val="3A3A55">
-                <a:alpha val="12941"/>
-              </a:srgbClr>
-            </a:outerShdw>
-          </a:effectLst>
-        </p:spPr>
-        <p:txBody>
-          <a:bodyPr spcFirstLastPara="1" wrap="square" lIns="91425" tIns="91425" rIns="91425" bIns="91425" anchor="ctr" anchorCtr="0">
-            <a:noAutofit/>
-          </a:bodyPr>
-          <a:lstStyle/>
-          <a:p>
-            <a:pPr marL="0" lvl="0" indent="0" algn="l" rtl="0">
-              <a:spcBef>
-                <a:spcPts val="0"/>
-              </a:spcBef>
-              <a:spcAft>
-                <a:spcPts val="0"/>
-              </a:spcAft>
-              <a:buNone/>
-            </a:pPr>
-            <a:endParaRPr/>
-          </a:p>
-        </p:txBody>
-      </p:sp>
-      <p:sp>
-        <p:nvSpPr>
-          <p:cNvPr id="409" name="Google Shape;409;p21"/>
-          <p:cNvSpPr/>
-          <p:nvPr/>
-        </p:nvSpPr>
-        <p:spPr>
-          <a:xfrm>
-            <a:off x="4617720" y="1892808"/>
-            <a:ext cx="640080" cy="640080"/>
-          </a:xfrm>
-          <a:prstGeom prst="ellipse">
-            <a:avLst/>
-          </a:prstGeom>
-          <a:solidFill>
-            <a:srgbClr val="F6C6C0"/>
-          </a:solidFill>
-          <a:ln>
-            <a:noFill/>
-          </a:ln>
-        </p:spPr>
-        <p:txBody>
-          <a:bodyPr spcFirstLastPara="1" wrap="square" lIns="91425" tIns="91425" rIns="91425" bIns="91425" anchor="ctr" anchorCtr="0">
-            <a:noAutofit/>
-          </a:bodyPr>
-          <a:lstStyle/>
-          <a:p>
-            <a:pPr marL="0" lvl="0" indent="0" algn="l" rtl="0">
-              <a:spcBef>
-                <a:spcPts val="0"/>
-              </a:spcBef>
-              <a:spcAft>
-                <a:spcPts val="0"/>
-              </a:spcAft>
-              <a:buNone/>
-            </a:pPr>
-            <a:endParaRPr/>
-          </a:p>
-        </p:txBody>
-      </p:sp>
-      <p:pic>
-        <p:nvPicPr>
-          <p:cNvPr id="410" name="Google Shape;410;p21" descr="/tmp/gan_ppt/icons/users_dark.png"/>
-          <p:cNvPicPr preferRelativeResize="0"/>
-          <p:nvPr/>
-        </p:nvPicPr>
-        <p:blipFill rotWithShape="1">
-          <a:blip r:embed="rId3">
-            <a:alphaModFix/>
-          </a:blip>
-          <a:srcRect/>
-          <a:stretch/>
-        </p:blipFill>
-        <p:spPr>
-          <a:xfrm>
-            <a:off x="4782312" y="2057400"/>
-            <a:ext cx="310896" cy="310896"/>
-          </a:xfrm>
-          <a:prstGeom prst="rect">
-            <a:avLst/>
-          </a:prstGeom>
-          <a:noFill/>
-          <a:ln>
-            <a:noFill/>
-          </a:ln>
-        </p:spPr>
-      </p:pic>
-      <p:sp>
-        <p:nvSpPr>
-          <p:cNvPr id="411" name="Google Shape;411;p21"/>
-          <p:cNvSpPr txBox="1"/>
-          <p:nvPr/>
-        </p:nvSpPr>
-        <p:spPr>
-          <a:xfrm>
-            <a:off x="4599432" y="2679192"/>
-            <a:ext cx="2990088" cy="685800"/>
-          </a:xfrm>
-          <a:prstGeom prst="rect">
-            <a:avLst/>
-          </a:prstGeom>
-          <a:noFill/>
-          <a:ln>
-            <a:noFill/>
-          </a:ln>
-        </p:spPr>
-        <p:txBody>
-          <a:bodyPr spcFirstLastPara="1" wrap="square" lIns="0" tIns="0" rIns="0" bIns="0" anchor="ctr" anchorCtr="0">
-            <a:noAutofit/>
-          </a:bodyPr>
-          <a:lstStyle/>
-          <a:p>
-            <a:pPr marL="0" marR="0" lvl="0" indent="0" algn="l" rtl="0">
-              <a:lnSpc>
-                <a:spcPct val="105000"/>
-              </a:lnSpc>
-              <a:spcBef>
-                <a:spcPts val="0"/>
-              </a:spcBef>
-              <a:spcAft>
-                <a:spcPts val="0"/>
-              </a:spcAft>
-              <a:buClr>
-                <a:srgbClr val="2E2E3A"/>
-              </a:buClr>
-              <a:buSzPts val="1700"/>
-              <a:buFont typeface="Cambria"/>
-              <a:buNone/>
-            </a:pPr>
-            <a:r>
-              <a:rPr lang="en-US" sz="1700" b="1">
-                <a:solidFill>
-                  <a:srgbClr val="2E2E3A"/>
-                </a:solidFill>
-                <a:latin typeface="Cambria"/>
-                <a:ea typeface="Cambria"/>
-                <a:cs typeface="Cambria"/>
-                <a:sym typeface="Cambria"/>
-              </a:rPr>
-              <a:t>Diya Jothish</a:t>
-            </a:r>
-            <a:endParaRPr sz="1700" b="0" i="0" u="none" strike="noStrike" cap="none">
-              <a:solidFill>
-                <a:schemeClr val="dk1"/>
-              </a:solidFill>
-              <a:latin typeface="Calibri"/>
-              <a:ea typeface="Calibri"/>
-              <a:cs typeface="Calibri"/>
-              <a:sym typeface="Calibri"/>
-            </a:endParaRPr>
-          </a:p>
-        </p:txBody>
-      </p:sp>
-      <p:sp>
-        <p:nvSpPr>
-          <p:cNvPr id="412" name="Google Shape;412;p21"/>
-          <p:cNvSpPr txBox="1"/>
-          <p:nvPr/>
-        </p:nvSpPr>
-        <p:spPr>
-          <a:xfrm>
-            <a:off x="4617720" y="3383280"/>
-            <a:ext cx="2953512" cy="2606040"/>
-          </a:xfrm>
-          <a:prstGeom prst="rect">
-            <a:avLst/>
-          </a:prstGeom>
-          <a:noFill/>
-          <a:ln>
-            <a:noFill/>
-          </a:ln>
-        </p:spPr>
-        <p:txBody>
-          <a:bodyPr spcFirstLastPara="1" wrap="square" lIns="0" tIns="0" rIns="0" bIns="0" anchor="t" anchorCtr="0">
-            <a:noAutofit/>
-          </a:bodyPr>
-          <a:lstStyle/>
-          <a:p>
-            <a:pPr marL="457200" lvl="0" indent="-323850" algn="l" rtl="0">
-              <a:lnSpc>
-                <a:spcPct val="108000"/>
-              </a:lnSpc>
-              <a:spcBef>
-                <a:spcPts val="1200"/>
-              </a:spcBef>
-              <a:spcAft>
-                <a:spcPts val="0"/>
-              </a:spcAft>
-              <a:buClr>
-                <a:srgbClr val="2E2E3A"/>
-              </a:buClr>
-              <a:buSzPts val="1500"/>
-              <a:buFont typeface="Calibri"/>
-              <a:buChar char="●"/>
-            </a:pPr>
-            <a:r>
-              <a:rPr lang="en-US" sz="1500">
-                <a:solidFill>
-                  <a:srgbClr val="2E2E3A"/>
-                </a:solidFill>
-                <a:latin typeface="Calibri"/>
-                <a:ea typeface="Calibri"/>
-                <a:cs typeface="Calibri"/>
-                <a:sym typeface="Calibri"/>
-              </a:rPr>
-              <a:t>Verified model saving and loading.</a:t>
-            </a:r>
-            <a:endParaRPr sz="1500">
-              <a:solidFill>
-                <a:srgbClr val="2E2E3A"/>
-              </a:solidFill>
-              <a:latin typeface="Calibri"/>
-              <a:ea typeface="Calibri"/>
-              <a:cs typeface="Calibri"/>
-              <a:sym typeface="Calibri"/>
-            </a:endParaRPr>
-          </a:p>
-          <a:p>
-            <a:pPr marL="457200" marR="0" lvl="0" indent="-323850" algn="l" rtl="0">
-              <a:lnSpc>
-                <a:spcPct val="108000"/>
-              </a:lnSpc>
-              <a:spcBef>
-                <a:spcPts val="0"/>
-              </a:spcBef>
-              <a:spcAft>
-                <a:spcPts val="0"/>
-              </a:spcAft>
-              <a:buClr>
-                <a:srgbClr val="2E2E3A"/>
-              </a:buClr>
-              <a:buSzPts val="1500"/>
-              <a:buFont typeface="Calibri"/>
-              <a:buChar char="●"/>
-            </a:pPr>
-            <a:r>
-              <a:rPr lang="en-US" sz="1500" b="0" i="0" u="none" strike="noStrike" cap="none">
-                <a:solidFill>
-                  <a:srgbClr val="2E2E3A"/>
-                </a:solidFill>
-                <a:latin typeface="Calibri"/>
-                <a:ea typeface="Calibri"/>
-                <a:cs typeface="Calibri"/>
-                <a:sym typeface="Calibri"/>
-              </a:rPr>
-              <a:t>Designed and implemented the Discriminator architecture and weight initialisation.</a:t>
-            </a:r>
-            <a:endParaRPr sz="1500">
-              <a:solidFill>
-                <a:srgbClr val="2E2E3A"/>
-              </a:solidFill>
-              <a:latin typeface="Calibri"/>
-              <a:ea typeface="Calibri"/>
-              <a:cs typeface="Calibri"/>
-              <a:sym typeface="Calibri"/>
-            </a:endParaRPr>
-          </a:p>
-          <a:p>
-            <a:pPr marL="457200" marR="0" lvl="0" indent="-323850" algn="l" rtl="0">
-              <a:lnSpc>
-                <a:spcPct val="108000"/>
-              </a:lnSpc>
-              <a:spcBef>
-                <a:spcPts val="0"/>
-              </a:spcBef>
-              <a:spcAft>
-                <a:spcPts val="0"/>
-              </a:spcAft>
-              <a:buClr>
-                <a:srgbClr val="2E2E3A"/>
-              </a:buClr>
-              <a:buSzPts val="1500"/>
-              <a:buFont typeface="Calibri"/>
-              <a:buChar char="●"/>
-            </a:pPr>
-            <a:r>
-              <a:rPr lang="en-US" sz="1500" b="0" i="0" u="none" strike="noStrike" cap="none">
-                <a:solidFill>
-                  <a:srgbClr val="2E2E3A"/>
-                </a:solidFill>
-                <a:latin typeface="Calibri"/>
-                <a:ea typeface="Calibri"/>
-                <a:cs typeface="Calibri"/>
-                <a:sym typeface="Calibri"/>
-              </a:rPr>
-              <a:t>Coded all visualisation functions: epoch grids, loss curves, real vs fake.</a:t>
-            </a:r>
-            <a:endParaRPr sz="1500" b="0" i="0" u="none" strike="noStrike" cap="none">
-              <a:solidFill>
-                <a:schemeClr val="dk1"/>
-              </a:solidFill>
-              <a:latin typeface="Calibri"/>
-              <a:ea typeface="Calibri"/>
-              <a:cs typeface="Calibri"/>
-              <a:sym typeface="Calibri"/>
-            </a:endParaRPr>
-          </a:p>
-          <a:p>
-            <a:pPr marL="457200" marR="0" lvl="0" indent="0" algn="l" rtl="0">
-              <a:lnSpc>
-                <a:spcPct val="108000"/>
-              </a:lnSpc>
-              <a:spcBef>
-                <a:spcPts val="1200"/>
-              </a:spcBef>
-              <a:spcAft>
-                <a:spcPts val="0"/>
-              </a:spcAft>
-              <a:buNone/>
-            </a:pPr>
-            <a:endParaRPr b="0" i="0" u="none" strike="noStrike" cap="none">
-              <a:solidFill>
-                <a:schemeClr val="dk1"/>
-              </a:solidFill>
-              <a:latin typeface="Calibri"/>
-              <a:ea typeface="Calibri"/>
-              <a:cs typeface="Calibri"/>
-              <a:sym typeface="Calibri"/>
-            </a:endParaRPr>
-          </a:p>
-        </p:txBody>
-      </p:sp>
-      <p:sp>
-        <p:nvSpPr>
-          <p:cNvPr id="413" name="Google Shape;413;p21"/>
-          <p:cNvSpPr/>
-          <p:nvPr/>
-        </p:nvSpPr>
-        <p:spPr>
-          <a:xfrm>
-            <a:off x="8101584" y="1600200"/>
-            <a:ext cx="3538728" cy="4526280"/>
-          </a:xfrm>
-          <a:prstGeom prst="roundRect">
-            <a:avLst>
-              <a:gd name="adj" fmla="val 2584"/>
-            </a:avLst>
-          </a:prstGeom>
-          <a:solidFill>
-            <a:srgbClr val="FFFFFF"/>
-          </a:solidFill>
-          <a:ln>
-            <a:noFill/>
-          </a:ln>
-          <a:effectLst>
-            <a:outerShdw blurRad="114300" dist="25400" dir="5400000" algn="bl" rotWithShape="0">
-              <a:srgbClr val="3A3A55">
-                <a:alpha val="12941"/>
-              </a:srgbClr>
-            </a:outerShdw>
-          </a:effectLst>
-        </p:spPr>
-        <p:txBody>
-          <a:bodyPr spcFirstLastPara="1" wrap="square" lIns="91425" tIns="91425" rIns="91425" bIns="91425" anchor="ctr" anchorCtr="0">
-            <a:noAutofit/>
-          </a:bodyPr>
-          <a:lstStyle/>
-          <a:p>
-            <a:pPr marL="0" lvl="0" indent="0" algn="l" rtl="0">
-              <a:spcBef>
-                <a:spcPts val="0"/>
-              </a:spcBef>
-              <a:spcAft>
-                <a:spcPts val="0"/>
-              </a:spcAft>
-              <a:buNone/>
-            </a:pPr>
-            <a:endParaRPr/>
-          </a:p>
-        </p:txBody>
-      </p:sp>
-      <p:sp>
-        <p:nvSpPr>
-          <p:cNvPr id="414" name="Google Shape;414;p21"/>
-          <p:cNvSpPr/>
-          <p:nvPr/>
-        </p:nvSpPr>
-        <p:spPr>
-          <a:xfrm>
-            <a:off x="8394192" y="1892808"/>
-            <a:ext cx="640200" cy="640200"/>
-          </a:xfrm>
-          <a:prstGeom prst="ellipse">
-            <a:avLst/>
-          </a:prstGeom>
-          <a:solidFill>
-            <a:srgbClr val="A8B8E8"/>
-          </a:solidFill>
-          <a:ln>
-            <a:noFill/>
-          </a:ln>
-        </p:spPr>
-        <p:txBody>
-          <a:bodyPr spcFirstLastPara="1" wrap="square" lIns="91425" tIns="91425" rIns="91425" bIns="91425" anchor="ctr" anchorCtr="0">
-            <a:noAutofit/>
-          </a:bodyPr>
-          <a:lstStyle/>
-          <a:p>
-            <a:pPr marL="0" lvl="0" indent="0" algn="l" rtl="0">
-              <a:spcBef>
-                <a:spcPts val="0"/>
-              </a:spcBef>
-              <a:spcAft>
-                <a:spcPts val="0"/>
-              </a:spcAft>
-              <a:buNone/>
-            </a:pPr>
-            <a:endParaRPr/>
-          </a:p>
-        </p:txBody>
-      </p:sp>
-      <p:pic>
-        <p:nvPicPr>
-          <p:cNvPr id="415" name="Google Shape;415;p21" descr="/tmp/gan_ppt/icons/users_dark.png"/>
-          <p:cNvPicPr preferRelativeResize="0"/>
-          <p:nvPr/>
-        </p:nvPicPr>
-        <p:blipFill rotWithShape="1">
-          <a:blip r:embed="rId3">
-            <a:alphaModFix/>
-          </a:blip>
-          <a:srcRect/>
-          <a:stretch/>
-        </p:blipFill>
-        <p:spPr>
-          <a:xfrm>
-            <a:off x="8558784" y="2057400"/>
-            <a:ext cx="310896" cy="310896"/>
-          </a:xfrm>
-          <a:prstGeom prst="rect">
-            <a:avLst/>
-          </a:prstGeom>
-          <a:noFill/>
-          <a:ln>
-            <a:noFill/>
-          </a:ln>
-        </p:spPr>
-      </p:pic>
-      <p:sp>
-        <p:nvSpPr>
-          <p:cNvPr id="416" name="Google Shape;416;p21"/>
-          <p:cNvSpPr txBox="1"/>
-          <p:nvPr/>
-        </p:nvSpPr>
-        <p:spPr>
-          <a:xfrm>
-            <a:off x="8375904" y="2679192"/>
-            <a:ext cx="2990088" cy="685800"/>
-          </a:xfrm>
-          <a:prstGeom prst="rect">
-            <a:avLst/>
-          </a:prstGeom>
-          <a:noFill/>
-          <a:ln>
-            <a:noFill/>
-          </a:ln>
-        </p:spPr>
-        <p:txBody>
-          <a:bodyPr spcFirstLastPara="1" wrap="square" lIns="0" tIns="0" rIns="0" bIns="0" anchor="ctr" anchorCtr="0">
-            <a:noAutofit/>
-          </a:bodyPr>
-          <a:lstStyle/>
-          <a:p>
-            <a:pPr marL="0" lvl="0" indent="0" algn="l" rtl="0">
-              <a:lnSpc>
-                <a:spcPct val="105000"/>
-              </a:lnSpc>
-              <a:spcBef>
-                <a:spcPts val="0"/>
-              </a:spcBef>
-              <a:spcAft>
-                <a:spcPts val="0"/>
-              </a:spcAft>
-              <a:buClr>
-                <a:srgbClr val="2E2E3A"/>
-              </a:buClr>
-              <a:buSzPts val="1700"/>
-              <a:buFont typeface="Cambria"/>
-              <a:buNone/>
-            </a:pPr>
-            <a:r>
-              <a:rPr lang="en-US" sz="1700" b="1">
-                <a:solidFill>
-                  <a:srgbClr val="2E2E3A"/>
-                </a:solidFill>
-                <a:latin typeface="Cambria"/>
-                <a:ea typeface="Cambria"/>
-                <a:cs typeface="Cambria"/>
-                <a:sym typeface="Cambria"/>
-              </a:rPr>
-              <a:t>Annabel Marianne Victor</a:t>
-            </a:r>
-            <a:endParaRPr sz="1700" b="0" i="0" u="none" strike="noStrike" cap="none">
-              <a:solidFill>
-                <a:schemeClr val="dk1"/>
-              </a:solidFill>
-              <a:latin typeface="Calibri"/>
-              <a:ea typeface="Calibri"/>
-              <a:cs typeface="Calibri"/>
-              <a:sym typeface="Calibri"/>
-            </a:endParaRPr>
-          </a:p>
-        </p:txBody>
-      </p:sp>
-      <p:sp>
-        <p:nvSpPr>
-          <p:cNvPr id="417" name="Google Shape;417;p21"/>
-          <p:cNvSpPr txBox="1"/>
-          <p:nvPr/>
-        </p:nvSpPr>
-        <p:spPr>
-          <a:xfrm>
-            <a:off x="8394192" y="3383280"/>
-            <a:ext cx="2953512" cy="2606040"/>
-          </a:xfrm>
-          <a:prstGeom prst="rect">
-            <a:avLst/>
-          </a:prstGeom>
-          <a:noFill/>
-          <a:ln>
-            <a:noFill/>
-          </a:ln>
-        </p:spPr>
-        <p:txBody>
-          <a:bodyPr spcFirstLastPara="1" wrap="square" lIns="0" tIns="0" rIns="0" bIns="0" anchor="t" anchorCtr="0">
-            <a:noAutofit/>
-          </a:bodyPr>
-          <a:lstStyle/>
-          <a:p>
-            <a:pPr marL="457200" marR="0" lvl="0" indent="-323850" algn="l" rtl="0">
-              <a:lnSpc>
-                <a:spcPct val="108000"/>
-              </a:lnSpc>
-              <a:spcBef>
-                <a:spcPts val="0"/>
-              </a:spcBef>
-              <a:spcAft>
-                <a:spcPts val="0"/>
-              </a:spcAft>
-              <a:buClr>
-                <a:srgbClr val="2E2E3A"/>
-              </a:buClr>
-              <a:buSzPts val="1500"/>
-              <a:buFont typeface="Calibri"/>
-              <a:buChar char="●"/>
-            </a:pPr>
-            <a:r>
-              <a:rPr lang="en-US" sz="1500" b="0" i="0" u="none" strike="noStrike" cap="none">
-                <a:solidFill>
-                  <a:srgbClr val="2E2E3A"/>
-                </a:solidFill>
-                <a:latin typeface="Calibri"/>
-                <a:ea typeface="Calibri"/>
-                <a:cs typeface="Calibri"/>
-                <a:sym typeface="Calibri"/>
-              </a:rPr>
-              <a:t>Handled MNIST data loading, normalisation and DataLoader setup.</a:t>
-            </a:r>
-            <a:endParaRPr sz="1500" b="0" i="0" u="none" strike="noStrike" cap="none">
-              <a:solidFill>
-                <a:srgbClr val="2E2E3A"/>
-              </a:solidFill>
-              <a:latin typeface="Calibri"/>
-              <a:ea typeface="Calibri"/>
-              <a:cs typeface="Calibri"/>
-              <a:sym typeface="Calibri"/>
-            </a:endParaRPr>
-          </a:p>
-          <a:p>
-            <a:pPr marL="457200" lvl="0" indent="-323850" algn="l" rtl="0">
-              <a:lnSpc>
-                <a:spcPct val="108000"/>
-              </a:lnSpc>
-              <a:spcBef>
-                <a:spcPts val="0"/>
-              </a:spcBef>
-              <a:spcAft>
-                <a:spcPts val="0"/>
-              </a:spcAft>
-              <a:buClr>
-                <a:srgbClr val="2E2E3A"/>
-              </a:buClr>
-              <a:buSzPts val="1500"/>
-              <a:buFont typeface="Calibri"/>
-              <a:buChar char="●"/>
-            </a:pPr>
-            <a:r>
-              <a:rPr lang="en-US" sz="1500">
-                <a:solidFill>
-                  <a:srgbClr val="2E2E3A"/>
-                </a:solidFill>
-                <a:latin typeface="Calibri"/>
-                <a:ea typeface="Calibri"/>
-                <a:cs typeface="Calibri"/>
-                <a:sym typeface="Calibri"/>
-              </a:rPr>
-              <a:t>Analysed training dynamics and documented the results.</a:t>
-            </a:r>
-            <a:endParaRPr sz="1500">
-              <a:solidFill>
-                <a:schemeClr val="dk1"/>
-              </a:solidFill>
-              <a:latin typeface="Calibri"/>
-              <a:ea typeface="Calibri"/>
-              <a:cs typeface="Calibri"/>
-              <a:sym typeface="Calibri"/>
-            </a:endParaRPr>
-          </a:p>
-          <a:p>
-            <a:pPr marL="457200" lvl="0" indent="-323850" algn="l" rtl="0">
-              <a:lnSpc>
-                <a:spcPct val="108000"/>
-              </a:lnSpc>
-              <a:spcBef>
-                <a:spcPts val="0"/>
-              </a:spcBef>
-              <a:spcAft>
-                <a:spcPts val="0"/>
-              </a:spcAft>
-              <a:buClr>
-                <a:srgbClr val="2E2E3A"/>
-              </a:buClr>
-              <a:buSzPts val="1500"/>
-              <a:buFont typeface="Calibri"/>
-              <a:buChar char="●"/>
-            </a:pPr>
-            <a:r>
-              <a:rPr lang="en-US" sz="1500">
-                <a:solidFill>
-                  <a:srgbClr val="2E2E3A"/>
-                </a:solidFill>
-                <a:latin typeface="Calibri"/>
-                <a:ea typeface="Calibri"/>
-                <a:cs typeface="Calibri"/>
-                <a:sym typeface="Calibri"/>
-              </a:rPr>
-              <a:t>Verified generated image quality across epochs.</a:t>
-            </a:r>
-            <a:endParaRPr sz="1500">
-              <a:solidFill>
-                <a:srgbClr val="2E2E3A"/>
-              </a:solidFill>
-              <a:latin typeface="Calibri"/>
-              <a:ea typeface="Calibri"/>
-              <a:cs typeface="Calibri"/>
-              <a:sym typeface="Calibri"/>
-            </a:endParaRPr>
-          </a:p>
-          <a:p>
-            <a:pPr marL="457200" marR="0" lvl="0" indent="0" algn="l" rtl="0">
-              <a:lnSpc>
-                <a:spcPct val="108000"/>
-              </a:lnSpc>
-              <a:spcBef>
-                <a:spcPts val="1200"/>
-              </a:spcBef>
-              <a:spcAft>
-                <a:spcPts val="0"/>
-              </a:spcAft>
-              <a:buNone/>
-            </a:pPr>
-            <a:endParaRPr sz="1500" b="0" i="0" u="none" strike="noStrike" cap="none">
-              <a:solidFill>
-                <a:schemeClr val="dk1"/>
-              </a:solidFill>
-              <a:latin typeface="Calibri"/>
-              <a:ea typeface="Calibri"/>
-              <a:cs typeface="Calibri"/>
-              <a:sym typeface="Calibri"/>
-            </a:endParaRPr>
-          </a:p>
-        </p:txBody>
-      </p:sp>
-      <p:sp>
-        <p:nvSpPr>
-          <p:cNvPr id="418" name="Google Shape;418;p21"/>
-          <p:cNvSpPr txBox="1"/>
-          <p:nvPr/>
-        </p:nvSpPr>
-        <p:spPr>
-          <a:xfrm>
-            <a:off x="548640" y="6492240"/>
-            <a:ext cx="7315200" cy="274320"/>
-          </a:xfrm>
-          <a:prstGeom prst="rect">
-            <a:avLst/>
-          </a:prstGeom>
-          <a:noFill/>
-          <a:ln>
-            <a:noFill/>
-          </a:ln>
-        </p:spPr>
-        <p:txBody>
-          <a:bodyPr spcFirstLastPara="1" wrap="square" lIns="0" tIns="0" rIns="0" bIns="0" anchor="ctr" anchorCtr="0">
-            <a:noAutofit/>
-          </a:bodyPr>
-          <a:lstStyle/>
-          <a:p>
-            <a:pPr marL="0" marR="0" lvl="0" indent="0" algn="l" rtl="0">
-              <a:spcBef>
-                <a:spcPts val="0"/>
-              </a:spcBef>
-              <a:spcAft>
-                <a:spcPts val="0"/>
-              </a:spcAft>
-              <a:buClr>
-                <a:srgbClr val="6E6E82"/>
-              </a:buClr>
-              <a:buSzPts val="900"/>
-              <a:buFont typeface="Calibri"/>
-              <a:buNone/>
-            </a:pPr>
-            <a:r>
-              <a:rPr lang="en-US" sz="900" b="0" i="0" u="none" strike="noStrike" cap="none">
-                <a:solidFill>
-                  <a:srgbClr val="6E6E82"/>
-                </a:solidFill>
-                <a:latin typeface="Calibri"/>
-                <a:ea typeface="Calibri"/>
-                <a:cs typeface="Calibri"/>
-                <a:sym typeface="Calibri"/>
-              </a:rPr>
-              <a:t>GAN-Based Handwritten Digit Generation</a:t>
-            </a:r>
-            <a:endParaRPr sz="900" b="0" i="0" u="none" strike="noStrike" cap="none">
-              <a:solidFill>
-                <a:schemeClr val="dk1"/>
-              </a:solidFill>
-              <a:latin typeface="Calibri"/>
-              <a:ea typeface="Calibri"/>
-              <a:cs typeface="Calibri"/>
-              <a:sym typeface="Calibri"/>
-            </a:endParaRPr>
-          </a:p>
-        </p:txBody>
-      </p:sp>
-      <p:sp>
-        <p:nvSpPr>
-          <p:cNvPr id="419" name="Google Shape;419;p21"/>
-          <p:cNvSpPr txBox="1"/>
-          <p:nvPr/>
-        </p:nvSpPr>
-        <p:spPr>
-          <a:xfrm>
-            <a:off x="11274552" y="6492240"/>
-            <a:ext cx="365760" cy="274320"/>
-          </a:xfrm>
-          <a:prstGeom prst="rect">
-            <a:avLst/>
-          </a:prstGeom>
-          <a:noFill/>
-          <a:ln>
-            <a:noFill/>
-          </a:ln>
-        </p:spPr>
-        <p:txBody>
-          <a:bodyPr spcFirstLastPara="1" wrap="square" lIns="0" tIns="0" rIns="0" bIns="0" anchor="ctr" anchorCtr="0">
-            <a:noAutofit/>
-          </a:bodyPr>
-          <a:lstStyle/>
-          <a:p>
-            <a:pPr marL="0" marR="0" lvl="0" indent="0" algn="r" rtl="0">
-              <a:spcBef>
-                <a:spcPts val="0"/>
-              </a:spcBef>
-              <a:spcAft>
-                <a:spcPts val="0"/>
-              </a:spcAft>
-              <a:buClr>
-                <a:srgbClr val="6E6E82"/>
-              </a:buClr>
-              <a:buSzPts val="900"/>
-              <a:buFont typeface="Calibri"/>
-              <a:buNone/>
-            </a:pPr>
-            <a:r>
-              <a:rPr lang="en-US" sz="900" b="0" i="0" u="none" strike="noStrike" cap="none">
-                <a:solidFill>
-                  <a:srgbClr val="6E6E82"/>
-                </a:solidFill>
-                <a:latin typeface="Calibri"/>
-                <a:ea typeface="Calibri"/>
-                <a:cs typeface="Calibri"/>
-                <a:sym typeface="Calibri"/>
-              </a:rPr>
-              <a:t>19</a:t>
             </a:r>
             <a:endParaRPr sz="900" b="0" i="0" u="none" strike="noStrike" cap="none">
               <a:solidFill>
@@ -16717,6 +17321,1392 @@
 </file>
 
 <file path=ppt/slides/slide20.xml><?xml version="1.0" encoding="utf-8"?>
+<p:sld xmlns:a="http://schemas.openxmlformats.org/drawingml/2006/main" xmlns:r="http://schemas.openxmlformats.org/officeDocument/2006/relationships" xmlns:p="http://schemas.openxmlformats.org/presentationml/2006/main">
+  <p:cSld>
+    <p:bg>
+      <p:bgPr>
+        <a:solidFill>
+          <a:srgbClr val="FAFAFC"/>
+        </a:solidFill>
+        <a:effectLst/>
+      </p:bgPr>
+    </p:bg>
+    <p:spTree>
+      <p:nvGrpSpPr>
+        <p:cNvPr id="1" name="Shape 400"/>
+        <p:cNvGrpSpPr/>
+        <p:nvPr/>
+      </p:nvGrpSpPr>
+      <p:grpSpPr>
+        <a:xfrm>
+          <a:off x="0" y="0"/>
+          <a:ext cx="0" cy="0"/>
+          <a:chOff x="0" y="0"/>
+          <a:chExt cx="0" cy="0"/>
+        </a:xfrm>
+      </p:grpSpPr>
+      <p:sp>
+        <p:nvSpPr>
+          <p:cNvPr id="401" name="Google Shape;401;p21"/>
+          <p:cNvSpPr txBox="1"/>
+          <p:nvPr/>
+        </p:nvSpPr>
+        <p:spPr>
+          <a:xfrm>
+            <a:off x="548640" y="457200"/>
+            <a:ext cx="9692640" cy="777240"/>
+          </a:xfrm>
+          <a:prstGeom prst="rect">
+            <a:avLst/>
+          </a:prstGeom>
+          <a:noFill/>
+          <a:ln>
+            <a:noFill/>
+          </a:ln>
+        </p:spPr>
+        <p:txBody>
+          <a:bodyPr spcFirstLastPara="1" wrap="square" lIns="0" tIns="0" rIns="0" bIns="0" anchor="t" anchorCtr="0">
+            <a:noAutofit/>
+          </a:bodyPr>
+          <a:lstStyle/>
+          <a:p>
+            <a:pPr marL="0" marR="0" lvl="0" indent="0" algn="l" rtl="0">
+              <a:spcBef>
+                <a:spcPts val="0"/>
+              </a:spcBef>
+              <a:spcAft>
+                <a:spcPts val="0"/>
+              </a:spcAft>
+              <a:buClr>
+                <a:srgbClr val="2E2E3A"/>
+              </a:buClr>
+              <a:buSzPts val="3000"/>
+              <a:buFont typeface="Cambria"/>
+              <a:buNone/>
+            </a:pPr>
+            <a:r>
+              <a:rPr lang="en-US" sz="4500" b="1" i="0" u="none" strike="noStrike" cap="none">
+                <a:solidFill>
+                  <a:srgbClr val="2E2E3A"/>
+                </a:solidFill>
+                <a:latin typeface="Cambria"/>
+                <a:ea typeface="Cambria"/>
+                <a:cs typeface="Cambria"/>
+                <a:sym typeface="Cambria"/>
+              </a:rPr>
+              <a:t>Individual Contributions</a:t>
+            </a:r>
+            <a:endParaRPr sz="4500" b="0" i="0" u="none" strike="noStrike" cap="none">
+              <a:solidFill>
+                <a:schemeClr val="dk1"/>
+              </a:solidFill>
+              <a:latin typeface="Calibri"/>
+              <a:ea typeface="Calibri"/>
+              <a:cs typeface="Calibri"/>
+              <a:sym typeface="Calibri"/>
+            </a:endParaRPr>
+          </a:p>
+        </p:txBody>
+      </p:sp>
+      <p:sp>
+        <p:nvSpPr>
+          <p:cNvPr id="402" name="Google Shape;402;p21"/>
+          <p:cNvSpPr txBox="1"/>
+          <p:nvPr/>
+        </p:nvSpPr>
+        <p:spPr>
+          <a:xfrm>
+            <a:off x="566928" y="256032"/>
+            <a:ext cx="7315200" cy="274320"/>
+          </a:xfrm>
+          <a:prstGeom prst="rect">
+            <a:avLst/>
+          </a:prstGeom>
+          <a:noFill/>
+          <a:ln>
+            <a:noFill/>
+          </a:ln>
+        </p:spPr>
+        <p:txBody>
+          <a:bodyPr spcFirstLastPara="1" wrap="square" lIns="0" tIns="0" rIns="0" bIns="0" anchor="ctr" anchorCtr="0">
+            <a:noAutofit/>
+          </a:bodyPr>
+          <a:lstStyle/>
+          <a:p>
+            <a:pPr marL="0" marR="0" lvl="0" indent="0" algn="l" rtl="0">
+              <a:spcBef>
+                <a:spcPts val="0"/>
+              </a:spcBef>
+              <a:spcAft>
+                <a:spcPts val="0"/>
+              </a:spcAft>
+              <a:buClr>
+                <a:srgbClr val="6E6E82"/>
+              </a:buClr>
+              <a:buSzPts val="1150"/>
+              <a:buFont typeface="Calibri"/>
+              <a:buNone/>
+            </a:pPr>
+            <a:r>
+              <a:rPr lang="en-US" sz="2000" b="1" i="0" u="none" strike="noStrike" cap="none">
+                <a:solidFill>
+                  <a:srgbClr val="6E6E82"/>
+                </a:solidFill>
+                <a:latin typeface="Calibri"/>
+                <a:ea typeface="Calibri"/>
+                <a:cs typeface="Calibri"/>
+                <a:sym typeface="Calibri"/>
+              </a:rPr>
+              <a:t>11 · TEAM</a:t>
+            </a:r>
+            <a:endParaRPr sz="2000" b="0" i="0" u="none" strike="noStrike" cap="none">
+              <a:solidFill>
+                <a:schemeClr val="dk1"/>
+              </a:solidFill>
+              <a:latin typeface="Calibri"/>
+              <a:ea typeface="Calibri"/>
+              <a:cs typeface="Calibri"/>
+              <a:sym typeface="Calibri"/>
+            </a:endParaRPr>
+          </a:p>
+        </p:txBody>
+      </p:sp>
+      <p:sp>
+        <p:nvSpPr>
+          <p:cNvPr id="403" name="Google Shape;403;p21"/>
+          <p:cNvSpPr/>
+          <p:nvPr/>
+        </p:nvSpPr>
+        <p:spPr>
+          <a:xfrm>
+            <a:off x="548640" y="1600200"/>
+            <a:ext cx="3538728" cy="4526280"/>
+          </a:xfrm>
+          <a:prstGeom prst="roundRect">
+            <a:avLst>
+              <a:gd name="adj" fmla="val 2584"/>
+            </a:avLst>
+          </a:prstGeom>
+          <a:solidFill>
+            <a:srgbClr val="FFFFFF"/>
+          </a:solidFill>
+          <a:ln>
+            <a:noFill/>
+          </a:ln>
+          <a:effectLst>
+            <a:outerShdw blurRad="114300" dist="25400" dir="5400000" algn="bl" rotWithShape="0">
+              <a:srgbClr val="3A3A55">
+                <a:alpha val="12941"/>
+              </a:srgbClr>
+            </a:outerShdw>
+          </a:effectLst>
+        </p:spPr>
+        <p:txBody>
+          <a:bodyPr spcFirstLastPara="1" wrap="square" lIns="91425" tIns="91425" rIns="91425" bIns="91425" anchor="ctr" anchorCtr="0">
+            <a:noAutofit/>
+          </a:bodyPr>
+          <a:lstStyle/>
+          <a:p>
+            <a:pPr marL="0" lvl="0" indent="0" algn="l" rtl="0">
+              <a:spcBef>
+                <a:spcPts val="0"/>
+              </a:spcBef>
+              <a:spcAft>
+                <a:spcPts val="0"/>
+              </a:spcAft>
+              <a:buNone/>
+            </a:pPr>
+            <a:endParaRPr/>
+          </a:p>
+        </p:txBody>
+      </p:sp>
+      <p:sp>
+        <p:nvSpPr>
+          <p:cNvPr id="404" name="Google Shape;404;p21"/>
+          <p:cNvSpPr/>
+          <p:nvPr/>
+        </p:nvSpPr>
+        <p:spPr>
+          <a:xfrm>
+            <a:off x="841248" y="1892808"/>
+            <a:ext cx="640200" cy="640200"/>
+          </a:xfrm>
+          <a:prstGeom prst="ellipse">
+            <a:avLst/>
+          </a:prstGeom>
+          <a:solidFill>
+            <a:srgbClr val="BFE3D0"/>
+          </a:solidFill>
+          <a:ln>
+            <a:noFill/>
+          </a:ln>
+        </p:spPr>
+        <p:txBody>
+          <a:bodyPr spcFirstLastPara="1" wrap="square" lIns="91425" tIns="91425" rIns="91425" bIns="91425" anchor="ctr" anchorCtr="0">
+            <a:noAutofit/>
+          </a:bodyPr>
+          <a:lstStyle/>
+          <a:p>
+            <a:pPr marL="0" lvl="0" indent="0" algn="l" rtl="0">
+              <a:spcBef>
+                <a:spcPts val="0"/>
+              </a:spcBef>
+              <a:spcAft>
+                <a:spcPts val="0"/>
+              </a:spcAft>
+              <a:buNone/>
+            </a:pPr>
+            <a:endParaRPr/>
+          </a:p>
+        </p:txBody>
+      </p:sp>
+      <p:pic>
+        <p:nvPicPr>
+          <p:cNvPr id="405" name="Google Shape;405;p21" descr="/tmp/gan_ppt/icons/users_dark.png"/>
+          <p:cNvPicPr preferRelativeResize="0"/>
+          <p:nvPr/>
+        </p:nvPicPr>
+        <p:blipFill rotWithShape="1">
+          <a:blip r:embed="rId3">
+            <a:alphaModFix/>
+          </a:blip>
+          <a:srcRect/>
+          <a:stretch/>
+        </p:blipFill>
+        <p:spPr>
+          <a:xfrm>
+            <a:off x="1005840" y="2057400"/>
+            <a:ext cx="310896" cy="310896"/>
+          </a:xfrm>
+          <a:prstGeom prst="rect">
+            <a:avLst/>
+          </a:prstGeom>
+          <a:noFill/>
+          <a:ln>
+            <a:noFill/>
+          </a:ln>
+        </p:spPr>
+      </p:pic>
+      <p:sp>
+        <p:nvSpPr>
+          <p:cNvPr id="406" name="Google Shape;406;p21"/>
+          <p:cNvSpPr txBox="1"/>
+          <p:nvPr/>
+        </p:nvSpPr>
+        <p:spPr>
+          <a:xfrm>
+            <a:off x="822960" y="2679192"/>
+            <a:ext cx="2990088" cy="685800"/>
+          </a:xfrm>
+          <a:prstGeom prst="rect">
+            <a:avLst/>
+          </a:prstGeom>
+          <a:noFill/>
+          <a:ln>
+            <a:noFill/>
+          </a:ln>
+        </p:spPr>
+        <p:txBody>
+          <a:bodyPr spcFirstLastPara="1" wrap="square" lIns="0" tIns="0" rIns="0" bIns="0" anchor="ctr" anchorCtr="0">
+            <a:noAutofit/>
+          </a:bodyPr>
+          <a:lstStyle/>
+          <a:p>
+            <a:pPr marL="0" marR="0" lvl="0" indent="0" algn="l" rtl="0">
+              <a:lnSpc>
+                <a:spcPct val="105000"/>
+              </a:lnSpc>
+              <a:spcBef>
+                <a:spcPts val="0"/>
+              </a:spcBef>
+              <a:spcAft>
+                <a:spcPts val="0"/>
+              </a:spcAft>
+              <a:buClr>
+                <a:srgbClr val="2E2E3A"/>
+              </a:buClr>
+              <a:buSzPts val="1700"/>
+              <a:buFont typeface="Cambria"/>
+              <a:buNone/>
+            </a:pPr>
+            <a:r>
+              <a:rPr lang="en-US" sz="1700" b="1" i="0" u="none" strike="noStrike" cap="none">
+                <a:solidFill>
+                  <a:srgbClr val="2E2E3A"/>
+                </a:solidFill>
+                <a:latin typeface="Cambria"/>
+                <a:ea typeface="Cambria"/>
+                <a:cs typeface="Cambria"/>
+                <a:sym typeface="Cambria"/>
+              </a:rPr>
+              <a:t>Amrith Saras</a:t>
+            </a:r>
+            <a:endParaRPr sz="1700" b="0" i="0" u="none" strike="noStrike" cap="none">
+              <a:solidFill>
+                <a:schemeClr val="dk1"/>
+              </a:solidFill>
+              <a:latin typeface="Calibri"/>
+              <a:ea typeface="Calibri"/>
+              <a:cs typeface="Calibri"/>
+              <a:sym typeface="Calibri"/>
+            </a:endParaRPr>
+          </a:p>
+        </p:txBody>
+      </p:sp>
+      <p:sp>
+        <p:nvSpPr>
+          <p:cNvPr id="407" name="Google Shape;407;p21"/>
+          <p:cNvSpPr txBox="1"/>
+          <p:nvPr/>
+        </p:nvSpPr>
+        <p:spPr>
+          <a:xfrm>
+            <a:off x="841248" y="3383280"/>
+            <a:ext cx="2953512" cy="2606040"/>
+          </a:xfrm>
+          <a:prstGeom prst="rect">
+            <a:avLst/>
+          </a:prstGeom>
+          <a:noFill/>
+          <a:ln>
+            <a:noFill/>
+          </a:ln>
+        </p:spPr>
+        <p:txBody>
+          <a:bodyPr spcFirstLastPara="1" wrap="square" lIns="0" tIns="0" rIns="0" bIns="0" anchor="t" anchorCtr="0">
+            <a:noAutofit/>
+          </a:bodyPr>
+          <a:lstStyle/>
+          <a:p>
+            <a:pPr marL="177800" marR="0" lvl="0" indent="-200025" algn="l" rtl="0">
+              <a:lnSpc>
+                <a:spcPct val="108000"/>
+              </a:lnSpc>
+              <a:spcBef>
+                <a:spcPts val="0"/>
+              </a:spcBef>
+              <a:spcAft>
+                <a:spcPts val="0"/>
+              </a:spcAft>
+              <a:buClr>
+                <a:srgbClr val="2E2E3A"/>
+              </a:buClr>
+              <a:buSzPts val="1500"/>
+              <a:buFont typeface="Calibri"/>
+              <a:buChar char="●"/>
+            </a:pPr>
+            <a:r>
+              <a:rPr lang="en-US" sz="1500" b="0" i="0" u="none" strike="noStrike" cap="none">
+                <a:solidFill>
+                  <a:srgbClr val="2E2E3A"/>
+                </a:solidFill>
+                <a:latin typeface="Calibri"/>
+                <a:ea typeface="Calibri"/>
+                <a:cs typeface="Calibri"/>
+                <a:sym typeface="Calibri"/>
+              </a:rPr>
+              <a:t>Designed and implemented the Generator architecture and full training loop.</a:t>
+            </a:r>
+            <a:endParaRPr sz="1500" b="0" i="0" u="none" strike="noStrike" cap="none">
+              <a:solidFill>
+                <a:schemeClr val="dk1"/>
+              </a:solidFill>
+              <a:latin typeface="Calibri"/>
+              <a:ea typeface="Calibri"/>
+              <a:cs typeface="Calibri"/>
+              <a:sym typeface="Calibri"/>
+            </a:endParaRPr>
+          </a:p>
+          <a:p>
+            <a:pPr marL="177800" marR="0" lvl="0" indent="-200025" algn="l" rtl="0">
+              <a:lnSpc>
+                <a:spcPct val="108000"/>
+              </a:lnSpc>
+              <a:spcBef>
+                <a:spcPts val="1200"/>
+              </a:spcBef>
+              <a:spcAft>
+                <a:spcPts val="0"/>
+              </a:spcAft>
+              <a:buClr>
+                <a:srgbClr val="2E2E3A"/>
+              </a:buClr>
+              <a:buSzPts val="1500"/>
+              <a:buFont typeface="Calibri"/>
+              <a:buChar char="●"/>
+            </a:pPr>
+            <a:r>
+              <a:rPr lang="en-US" sz="1500" b="0" i="0" u="none" strike="noStrike" cap="none">
+                <a:solidFill>
+                  <a:srgbClr val="2E2E3A"/>
+                </a:solidFill>
+                <a:latin typeface="Calibri"/>
+                <a:ea typeface="Calibri"/>
+                <a:cs typeface="Calibri"/>
+                <a:sym typeface="Calibri"/>
+              </a:rPr>
+              <a:t>Implemented the latent space interpolation experiment.</a:t>
+            </a:r>
+            <a:endParaRPr sz="1500" b="0" i="0" u="none" strike="noStrike" cap="none">
+              <a:solidFill>
+                <a:schemeClr val="dk1"/>
+              </a:solidFill>
+              <a:latin typeface="Calibri"/>
+              <a:ea typeface="Calibri"/>
+              <a:cs typeface="Calibri"/>
+              <a:sym typeface="Calibri"/>
+            </a:endParaRPr>
+          </a:p>
+          <a:p>
+            <a:pPr marL="177800" marR="0" lvl="0" indent="-200025" algn="l" rtl="0">
+              <a:lnSpc>
+                <a:spcPct val="108000"/>
+              </a:lnSpc>
+              <a:spcBef>
+                <a:spcPts val="1200"/>
+              </a:spcBef>
+              <a:spcAft>
+                <a:spcPts val="0"/>
+              </a:spcAft>
+              <a:buClr>
+                <a:srgbClr val="2E2E3A"/>
+              </a:buClr>
+              <a:buSzPts val="1500"/>
+              <a:buFont typeface="Calibri"/>
+              <a:buChar char="●"/>
+            </a:pPr>
+            <a:r>
+              <a:rPr lang="en-US" sz="1500" b="0" i="0" u="none" strike="noStrike" cap="none">
+                <a:solidFill>
+                  <a:srgbClr val="2E2E3A"/>
+                </a:solidFill>
+                <a:latin typeface="Calibri"/>
+                <a:ea typeface="Calibri"/>
+                <a:cs typeface="Calibri"/>
+                <a:sym typeface="Calibri"/>
+              </a:rPr>
+              <a:t>Set up the GPU training environment (CUDA PyTorch).</a:t>
+            </a:r>
+            <a:endParaRPr sz="1500" b="0" i="0" u="none" strike="noStrike" cap="none">
+              <a:solidFill>
+                <a:schemeClr val="dk1"/>
+              </a:solidFill>
+              <a:latin typeface="Calibri"/>
+              <a:ea typeface="Calibri"/>
+              <a:cs typeface="Calibri"/>
+              <a:sym typeface="Calibri"/>
+            </a:endParaRPr>
+          </a:p>
+          <a:p>
+            <a:pPr marL="0" marR="0" lvl="0" indent="0" algn="l" rtl="0">
+              <a:lnSpc>
+                <a:spcPct val="108000"/>
+              </a:lnSpc>
+              <a:spcBef>
+                <a:spcPts val="1200"/>
+              </a:spcBef>
+              <a:spcAft>
+                <a:spcPts val="0"/>
+              </a:spcAft>
+              <a:buNone/>
+            </a:pPr>
+            <a:endParaRPr sz="1500" b="0" i="0" u="none" strike="noStrike" cap="none">
+              <a:solidFill>
+                <a:schemeClr val="dk1"/>
+              </a:solidFill>
+              <a:latin typeface="Calibri"/>
+              <a:ea typeface="Calibri"/>
+              <a:cs typeface="Calibri"/>
+              <a:sym typeface="Calibri"/>
+            </a:endParaRPr>
+          </a:p>
+        </p:txBody>
+      </p:sp>
+      <p:sp>
+        <p:nvSpPr>
+          <p:cNvPr id="408" name="Google Shape;408;p21"/>
+          <p:cNvSpPr/>
+          <p:nvPr/>
+        </p:nvSpPr>
+        <p:spPr>
+          <a:xfrm>
+            <a:off x="4325112" y="1600200"/>
+            <a:ext cx="3538728" cy="4526280"/>
+          </a:xfrm>
+          <a:prstGeom prst="roundRect">
+            <a:avLst>
+              <a:gd name="adj" fmla="val 2584"/>
+            </a:avLst>
+          </a:prstGeom>
+          <a:solidFill>
+            <a:srgbClr val="FFFFFF"/>
+          </a:solidFill>
+          <a:ln>
+            <a:noFill/>
+          </a:ln>
+          <a:effectLst>
+            <a:outerShdw blurRad="114300" dist="25400" dir="5400000" algn="bl" rotWithShape="0">
+              <a:srgbClr val="3A3A55">
+                <a:alpha val="12941"/>
+              </a:srgbClr>
+            </a:outerShdw>
+          </a:effectLst>
+        </p:spPr>
+        <p:txBody>
+          <a:bodyPr spcFirstLastPara="1" wrap="square" lIns="91425" tIns="91425" rIns="91425" bIns="91425" anchor="ctr" anchorCtr="0">
+            <a:noAutofit/>
+          </a:bodyPr>
+          <a:lstStyle/>
+          <a:p>
+            <a:pPr marL="0" lvl="0" indent="0" algn="l" rtl="0">
+              <a:spcBef>
+                <a:spcPts val="0"/>
+              </a:spcBef>
+              <a:spcAft>
+                <a:spcPts val="0"/>
+              </a:spcAft>
+              <a:buNone/>
+            </a:pPr>
+            <a:endParaRPr/>
+          </a:p>
+        </p:txBody>
+      </p:sp>
+      <p:sp>
+        <p:nvSpPr>
+          <p:cNvPr id="409" name="Google Shape;409;p21"/>
+          <p:cNvSpPr/>
+          <p:nvPr/>
+        </p:nvSpPr>
+        <p:spPr>
+          <a:xfrm>
+            <a:off x="4617720" y="1892808"/>
+            <a:ext cx="640080" cy="640080"/>
+          </a:xfrm>
+          <a:prstGeom prst="ellipse">
+            <a:avLst/>
+          </a:prstGeom>
+          <a:solidFill>
+            <a:srgbClr val="F6C6C0"/>
+          </a:solidFill>
+          <a:ln>
+            <a:noFill/>
+          </a:ln>
+        </p:spPr>
+        <p:txBody>
+          <a:bodyPr spcFirstLastPara="1" wrap="square" lIns="91425" tIns="91425" rIns="91425" bIns="91425" anchor="ctr" anchorCtr="0">
+            <a:noAutofit/>
+          </a:bodyPr>
+          <a:lstStyle/>
+          <a:p>
+            <a:pPr marL="0" lvl="0" indent="0" algn="l" rtl="0">
+              <a:spcBef>
+                <a:spcPts val="0"/>
+              </a:spcBef>
+              <a:spcAft>
+                <a:spcPts val="0"/>
+              </a:spcAft>
+              <a:buNone/>
+            </a:pPr>
+            <a:endParaRPr/>
+          </a:p>
+        </p:txBody>
+      </p:sp>
+      <p:pic>
+        <p:nvPicPr>
+          <p:cNvPr id="410" name="Google Shape;410;p21" descr="/tmp/gan_ppt/icons/users_dark.png"/>
+          <p:cNvPicPr preferRelativeResize="0"/>
+          <p:nvPr/>
+        </p:nvPicPr>
+        <p:blipFill rotWithShape="1">
+          <a:blip r:embed="rId3">
+            <a:alphaModFix/>
+          </a:blip>
+          <a:srcRect/>
+          <a:stretch/>
+        </p:blipFill>
+        <p:spPr>
+          <a:xfrm>
+            <a:off x="4782312" y="2057400"/>
+            <a:ext cx="310896" cy="310896"/>
+          </a:xfrm>
+          <a:prstGeom prst="rect">
+            <a:avLst/>
+          </a:prstGeom>
+          <a:noFill/>
+          <a:ln>
+            <a:noFill/>
+          </a:ln>
+        </p:spPr>
+      </p:pic>
+      <p:sp>
+        <p:nvSpPr>
+          <p:cNvPr id="411" name="Google Shape;411;p21"/>
+          <p:cNvSpPr txBox="1"/>
+          <p:nvPr/>
+        </p:nvSpPr>
+        <p:spPr>
+          <a:xfrm>
+            <a:off x="4599432" y="2679192"/>
+            <a:ext cx="2990088" cy="685800"/>
+          </a:xfrm>
+          <a:prstGeom prst="rect">
+            <a:avLst/>
+          </a:prstGeom>
+          <a:noFill/>
+          <a:ln>
+            <a:noFill/>
+          </a:ln>
+        </p:spPr>
+        <p:txBody>
+          <a:bodyPr spcFirstLastPara="1" wrap="square" lIns="0" tIns="0" rIns="0" bIns="0" anchor="ctr" anchorCtr="0">
+            <a:noAutofit/>
+          </a:bodyPr>
+          <a:lstStyle/>
+          <a:p>
+            <a:pPr marL="0" marR="0" lvl="0" indent="0" algn="l" rtl="0">
+              <a:lnSpc>
+                <a:spcPct val="105000"/>
+              </a:lnSpc>
+              <a:spcBef>
+                <a:spcPts val="0"/>
+              </a:spcBef>
+              <a:spcAft>
+                <a:spcPts val="0"/>
+              </a:spcAft>
+              <a:buClr>
+                <a:srgbClr val="2E2E3A"/>
+              </a:buClr>
+              <a:buSzPts val="1700"/>
+              <a:buFont typeface="Cambria"/>
+              <a:buNone/>
+            </a:pPr>
+            <a:r>
+              <a:rPr lang="en-US" sz="1700" b="1">
+                <a:solidFill>
+                  <a:srgbClr val="2E2E3A"/>
+                </a:solidFill>
+                <a:latin typeface="Cambria"/>
+                <a:ea typeface="Cambria"/>
+                <a:cs typeface="Cambria"/>
+                <a:sym typeface="Cambria"/>
+              </a:rPr>
+              <a:t>Diya Jothish</a:t>
+            </a:r>
+            <a:endParaRPr sz="1700" b="0" i="0" u="none" strike="noStrike" cap="none">
+              <a:solidFill>
+                <a:schemeClr val="dk1"/>
+              </a:solidFill>
+              <a:latin typeface="Calibri"/>
+              <a:ea typeface="Calibri"/>
+              <a:cs typeface="Calibri"/>
+              <a:sym typeface="Calibri"/>
+            </a:endParaRPr>
+          </a:p>
+        </p:txBody>
+      </p:sp>
+      <p:sp>
+        <p:nvSpPr>
+          <p:cNvPr id="412" name="Google Shape;412;p21"/>
+          <p:cNvSpPr txBox="1"/>
+          <p:nvPr/>
+        </p:nvSpPr>
+        <p:spPr>
+          <a:xfrm>
+            <a:off x="4617720" y="3383280"/>
+            <a:ext cx="2953512" cy="2606040"/>
+          </a:xfrm>
+          <a:prstGeom prst="rect">
+            <a:avLst/>
+          </a:prstGeom>
+          <a:noFill/>
+          <a:ln>
+            <a:noFill/>
+          </a:ln>
+        </p:spPr>
+        <p:txBody>
+          <a:bodyPr spcFirstLastPara="1" wrap="square" lIns="0" tIns="0" rIns="0" bIns="0" anchor="t" anchorCtr="0">
+            <a:noAutofit/>
+          </a:bodyPr>
+          <a:lstStyle/>
+          <a:p>
+            <a:pPr marL="457200" lvl="0" indent="-323850" algn="l" rtl="0">
+              <a:lnSpc>
+                <a:spcPct val="108000"/>
+              </a:lnSpc>
+              <a:spcBef>
+                <a:spcPts val="1200"/>
+              </a:spcBef>
+              <a:spcAft>
+                <a:spcPts val="0"/>
+              </a:spcAft>
+              <a:buClr>
+                <a:srgbClr val="2E2E3A"/>
+              </a:buClr>
+              <a:buSzPts val="1500"/>
+              <a:buFont typeface="Calibri"/>
+              <a:buChar char="●"/>
+            </a:pPr>
+            <a:r>
+              <a:rPr lang="en-US" sz="1500" dirty="0">
+                <a:solidFill>
+                  <a:srgbClr val="2E2E3A"/>
+                </a:solidFill>
+                <a:latin typeface="Calibri"/>
+                <a:ea typeface="Calibri"/>
+                <a:cs typeface="Calibri"/>
+                <a:sym typeface="Calibri"/>
+              </a:rPr>
+              <a:t>Verified model saving and loading.</a:t>
+            </a:r>
+            <a:endParaRPr sz="1500" dirty="0">
+              <a:solidFill>
+                <a:srgbClr val="2E2E3A"/>
+              </a:solidFill>
+              <a:latin typeface="Calibri"/>
+              <a:ea typeface="Calibri"/>
+              <a:cs typeface="Calibri"/>
+              <a:sym typeface="Calibri"/>
+            </a:endParaRPr>
+          </a:p>
+          <a:p>
+            <a:pPr marL="457200" marR="0" lvl="0" indent="-323850" algn="l" rtl="0">
+              <a:lnSpc>
+                <a:spcPct val="108000"/>
+              </a:lnSpc>
+              <a:spcBef>
+                <a:spcPts val="0"/>
+              </a:spcBef>
+              <a:spcAft>
+                <a:spcPts val="0"/>
+              </a:spcAft>
+              <a:buClr>
+                <a:srgbClr val="2E2E3A"/>
+              </a:buClr>
+              <a:buSzPts val="1500"/>
+              <a:buFont typeface="Calibri"/>
+              <a:buChar char="●"/>
+            </a:pPr>
+            <a:r>
+              <a:rPr lang="en-US" sz="1500" b="0" i="0" u="none" strike="noStrike" cap="none" dirty="0">
+                <a:solidFill>
+                  <a:srgbClr val="2E2E3A"/>
+                </a:solidFill>
+                <a:latin typeface="Calibri"/>
+                <a:ea typeface="Calibri"/>
+                <a:cs typeface="Calibri"/>
+                <a:sym typeface="Calibri"/>
+              </a:rPr>
+              <a:t>Designed and implemented the Discriminator architecture and weight </a:t>
+            </a:r>
+            <a:r>
+              <a:rPr lang="en-US" sz="1500" b="0" i="0" u="none" strike="noStrike" cap="none" dirty="0" err="1">
+                <a:solidFill>
+                  <a:srgbClr val="2E2E3A"/>
+                </a:solidFill>
+                <a:latin typeface="Calibri"/>
+                <a:ea typeface="Calibri"/>
+                <a:cs typeface="Calibri"/>
+                <a:sym typeface="Calibri"/>
+              </a:rPr>
+              <a:t>initialisation</a:t>
+            </a:r>
+            <a:r>
+              <a:rPr lang="en-US" sz="1500" b="0" i="0" u="none" strike="noStrike" cap="none" dirty="0">
+                <a:solidFill>
+                  <a:srgbClr val="2E2E3A"/>
+                </a:solidFill>
+                <a:latin typeface="Calibri"/>
+                <a:ea typeface="Calibri"/>
+                <a:cs typeface="Calibri"/>
+                <a:sym typeface="Calibri"/>
+              </a:rPr>
+              <a:t>.</a:t>
+            </a:r>
+            <a:endParaRPr sz="1500" dirty="0">
+              <a:solidFill>
+                <a:srgbClr val="2E2E3A"/>
+              </a:solidFill>
+              <a:latin typeface="Calibri"/>
+              <a:ea typeface="Calibri"/>
+              <a:cs typeface="Calibri"/>
+              <a:sym typeface="Calibri"/>
+            </a:endParaRPr>
+          </a:p>
+          <a:p>
+            <a:pPr marL="457200" marR="0" lvl="0" indent="-323850" algn="l" rtl="0">
+              <a:lnSpc>
+                <a:spcPct val="108000"/>
+              </a:lnSpc>
+              <a:spcBef>
+                <a:spcPts val="0"/>
+              </a:spcBef>
+              <a:spcAft>
+                <a:spcPts val="0"/>
+              </a:spcAft>
+              <a:buClr>
+                <a:srgbClr val="2E2E3A"/>
+              </a:buClr>
+              <a:buSzPts val="1500"/>
+              <a:buFont typeface="Calibri"/>
+              <a:buChar char="●"/>
+            </a:pPr>
+            <a:r>
+              <a:rPr lang="en-US" sz="1500" b="0" i="0" u="none" strike="noStrike" cap="none" dirty="0">
+                <a:solidFill>
+                  <a:srgbClr val="2E2E3A"/>
+                </a:solidFill>
+                <a:latin typeface="Calibri"/>
+                <a:ea typeface="Calibri"/>
+                <a:cs typeface="Calibri"/>
+                <a:sym typeface="Calibri"/>
+              </a:rPr>
+              <a:t>Coded all </a:t>
+            </a:r>
+            <a:r>
+              <a:rPr lang="en-US" sz="1500" b="0" i="0" u="none" strike="noStrike" cap="none" dirty="0" err="1">
+                <a:solidFill>
+                  <a:srgbClr val="2E2E3A"/>
+                </a:solidFill>
+                <a:latin typeface="Calibri"/>
+                <a:ea typeface="Calibri"/>
+                <a:cs typeface="Calibri"/>
+                <a:sym typeface="Calibri"/>
+              </a:rPr>
+              <a:t>visualisation</a:t>
+            </a:r>
+            <a:r>
+              <a:rPr lang="en-US" sz="1500" b="0" i="0" u="none" strike="noStrike" cap="none" dirty="0">
+                <a:solidFill>
+                  <a:srgbClr val="2E2E3A"/>
+                </a:solidFill>
+                <a:latin typeface="Calibri"/>
+                <a:ea typeface="Calibri"/>
+                <a:cs typeface="Calibri"/>
+                <a:sym typeface="Calibri"/>
+              </a:rPr>
+              <a:t> functions</a:t>
+            </a:r>
+            <a:endParaRPr sz="1500" b="0" i="0" u="none" strike="noStrike" cap="none" dirty="0">
+              <a:solidFill>
+                <a:schemeClr val="dk1"/>
+              </a:solidFill>
+              <a:latin typeface="Calibri"/>
+              <a:ea typeface="Calibri"/>
+              <a:cs typeface="Calibri"/>
+              <a:sym typeface="Calibri"/>
+            </a:endParaRPr>
+          </a:p>
+          <a:p>
+            <a:pPr marL="457200" marR="0" lvl="0" indent="0" algn="l" rtl="0">
+              <a:lnSpc>
+                <a:spcPct val="108000"/>
+              </a:lnSpc>
+              <a:spcBef>
+                <a:spcPts val="1200"/>
+              </a:spcBef>
+              <a:spcAft>
+                <a:spcPts val="0"/>
+              </a:spcAft>
+              <a:buNone/>
+            </a:pPr>
+            <a:endParaRPr b="0" i="0" u="none" strike="noStrike" cap="none" dirty="0">
+              <a:solidFill>
+                <a:schemeClr val="dk1"/>
+              </a:solidFill>
+              <a:latin typeface="Calibri"/>
+              <a:ea typeface="Calibri"/>
+              <a:cs typeface="Calibri"/>
+              <a:sym typeface="Calibri"/>
+            </a:endParaRPr>
+          </a:p>
+        </p:txBody>
+      </p:sp>
+      <p:sp>
+        <p:nvSpPr>
+          <p:cNvPr id="413" name="Google Shape;413;p21"/>
+          <p:cNvSpPr/>
+          <p:nvPr/>
+        </p:nvSpPr>
+        <p:spPr>
+          <a:xfrm>
+            <a:off x="8101584" y="1600200"/>
+            <a:ext cx="3538728" cy="4526280"/>
+          </a:xfrm>
+          <a:prstGeom prst="roundRect">
+            <a:avLst>
+              <a:gd name="adj" fmla="val 2584"/>
+            </a:avLst>
+          </a:prstGeom>
+          <a:solidFill>
+            <a:srgbClr val="FFFFFF"/>
+          </a:solidFill>
+          <a:ln>
+            <a:noFill/>
+          </a:ln>
+          <a:effectLst>
+            <a:outerShdw blurRad="114300" dist="25400" dir="5400000" algn="bl" rotWithShape="0">
+              <a:srgbClr val="3A3A55">
+                <a:alpha val="12941"/>
+              </a:srgbClr>
+            </a:outerShdw>
+          </a:effectLst>
+        </p:spPr>
+        <p:txBody>
+          <a:bodyPr spcFirstLastPara="1" wrap="square" lIns="91425" tIns="91425" rIns="91425" bIns="91425" anchor="ctr" anchorCtr="0">
+            <a:noAutofit/>
+          </a:bodyPr>
+          <a:lstStyle/>
+          <a:p>
+            <a:pPr marL="0" lvl="0" indent="0" algn="l" rtl="0">
+              <a:spcBef>
+                <a:spcPts val="0"/>
+              </a:spcBef>
+              <a:spcAft>
+                <a:spcPts val="0"/>
+              </a:spcAft>
+              <a:buNone/>
+            </a:pPr>
+            <a:endParaRPr/>
+          </a:p>
+        </p:txBody>
+      </p:sp>
+      <p:sp>
+        <p:nvSpPr>
+          <p:cNvPr id="414" name="Google Shape;414;p21"/>
+          <p:cNvSpPr/>
+          <p:nvPr/>
+        </p:nvSpPr>
+        <p:spPr>
+          <a:xfrm>
+            <a:off x="8394192" y="1892808"/>
+            <a:ext cx="640200" cy="640200"/>
+          </a:xfrm>
+          <a:prstGeom prst="ellipse">
+            <a:avLst/>
+          </a:prstGeom>
+          <a:solidFill>
+            <a:srgbClr val="A8B8E8"/>
+          </a:solidFill>
+          <a:ln>
+            <a:noFill/>
+          </a:ln>
+        </p:spPr>
+        <p:txBody>
+          <a:bodyPr spcFirstLastPara="1" wrap="square" lIns="91425" tIns="91425" rIns="91425" bIns="91425" anchor="ctr" anchorCtr="0">
+            <a:noAutofit/>
+          </a:bodyPr>
+          <a:lstStyle/>
+          <a:p>
+            <a:pPr marL="0" lvl="0" indent="0" algn="l" rtl="0">
+              <a:spcBef>
+                <a:spcPts val="0"/>
+              </a:spcBef>
+              <a:spcAft>
+                <a:spcPts val="0"/>
+              </a:spcAft>
+              <a:buNone/>
+            </a:pPr>
+            <a:endParaRPr/>
+          </a:p>
+        </p:txBody>
+      </p:sp>
+      <p:pic>
+        <p:nvPicPr>
+          <p:cNvPr id="415" name="Google Shape;415;p21" descr="/tmp/gan_ppt/icons/users_dark.png"/>
+          <p:cNvPicPr preferRelativeResize="0"/>
+          <p:nvPr/>
+        </p:nvPicPr>
+        <p:blipFill rotWithShape="1">
+          <a:blip r:embed="rId3">
+            <a:alphaModFix/>
+          </a:blip>
+          <a:srcRect/>
+          <a:stretch/>
+        </p:blipFill>
+        <p:spPr>
+          <a:xfrm>
+            <a:off x="8558784" y="2057400"/>
+            <a:ext cx="310896" cy="310896"/>
+          </a:xfrm>
+          <a:prstGeom prst="rect">
+            <a:avLst/>
+          </a:prstGeom>
+          <a:noFill/>
+          <a:ln>
+            <a:noFill/>
+          </a:ln>
+        </p:spPr>
+      </p:pic>
+      <p:sp>
+        <p:nvSpPr>
+          <p:cNvPr id="416" name="Google Shape;416;p21"/>
+          <p:cNvSpPr txBox="1"/>
+          <p:nvPr/>
+        </p:nvSpPr>
+        <p:spPr>
+          <a:xfrm>
+            <a:off x="8375904" y="2679192"/>
+            <a:ext cx="2990088" cy="685800"/>
+          </a:xfrm>
+          <a:prstGeom prst="rect">
+            <a:avLst/>
+          </a:prstGeom>
+          <a:noFill/>
+          <a:ln>
+            <a:noFill/>
+          </a:ln>
+        </p:spPr>
+        <p:txBody>
+          <a:bodyPr spcFirstLastPara="1" wrap="square" lIns="0" tIns="0" rIns="0" bIns="0" anchor="ctr" anchorCtr="0">
+            <a:noAutofit/>
+          </a:bodyPr>
+          <a:lstStyle/>
+          <a:p>
+            <a:pPr marL="0" lvl="0" indent="0" algn="l" rtl="0">
+              <a:lnSpc>
+                <a:spcPct val="105000"/>
+              </a:lnSpc>
+              <a:spcBef>
+                <a:spcPts val="0"/>
+              </a:spcBef>
+              <a:spcAft>
+                <a:spcPts val="0"/>
+              </a:spcAft>
+              <a:buClr>
+                <a:srgbClr val="2E2E3A"/>
+              </a:buClr>
+              <a:buSzPts val="1700"/>
+              <a:buFont typeface="Cambria"/>
+              <a:buNone/>
+            </a:pPr>
+            <a:r>
+              <a:rPr lang="en-US" sz="1700" b="1">
+                <a:solidFill>
+                  <a:srgbClr val="2E2E3A"/>
+                </a:solidFill>
+                <a:latin typeface="Cambria"/>
+                <a:ea typeface="Cambria"/>
+                <a:cs typeface="Cambria"/>
+                <a:sym typeface="Cambria"/>
+              </a:rPr>
+              <a:t>Annabel Marianne Victor</a:t>
+            </a:r>
+            <a:endParaRPr sz="1700" b="0" i="0" u="none" strike="noStrike" cap="none">
+              <a:solidFill>
+                <a:schemeClr val="dk1"/>
+              </a:solidFill>
+              <a:latin typeface="Calibri"/>
+              <a:ea typeface="Calibri"/>
+              <a:cs typeface="Calibri"/>
+              <a:sym typeface="Calibri"/>
+            </a:endParaRPr>
+          </a:p>
+        </p:txBody>
+      </p:sp>
+      <p:sp>
+        <p:nvSpPr>
+          <p:cNvPr id="417" name="Google Shape;417;p21"/>
+          <p:cNvSpPr txBox="1"/>
+          <p:nvPr/>
+        </p:nvSpPr>
+        <p:spPr>
+          <a:xfrm>
+            <a:off x="8394192" y="3383280"/>
+            <a:ext cx="2953512" cy="2606040"/>
+          </a:xfrm>
+          <a:prstGeom prst="rect">
+            <a:avLst/>
+          </a:prstGeom>
+          <a:noFill/>
+          <a:ln>
+            <a:noFill/>
+          </a:ln>
+        </p:spPr>
+        <p:txBody>
+          <a:bodyPr spcFirstLastPara="1" wrap="square" lIns="0" tIns="0" rIns="0" bIns="0" anchor="t" anchorCtr="0">
+            <a:noAutofit/>
+          </a:bodyPr>
+          <a:lstStyle/>
+          <a:p>
+            <a:pPr marL="457200" marR="0" lvl="0" indent="-323850" algn="l" rtl="0">
+              <a:lnSpc>
+                <a:spcPct val="108000"/>
+              </a:lnSpc>
+              <a:spcBef>
+                <a:spcPts val="0"/>
+              </a:spcBef>
+              <a:spcAft>
+                <a:spcPts val="0"/>
+              </a:spcAft>
+              <a:buClr>
+                <a:srgbClr val="2E2E3A"/>
+              </a:buClr>
+              <a:buSzPts val="1500"/>
+              <a:buFont typeface="Calibri"/>
+              <a:buChar char="●"/>
+            </a:pPr>
+            <a:r>
+              <a:rPr lang="en-US" sz="1500" b="0" i="0" u="none" strike="noStrike" cap="none">
+                <a:solidFill>
+                  <a:srgbClr val="2E2E3A"/>
+                </a:solidFill>
+                <a:latin typeface="Calibri"/>
+                <a:ea typeface="Calibri"/>
+                <a:cs typeface="Calibri"/>
+                <a:sym typeface="Calibri"/>
+              </a:rPr>
+              <a:t>Handled MNIST data loading, normalisation and DataLoader setup.</a:t>
+            </a:r>
+            <a:endParaRPr sz="1500" b="0" i="0" u="none" strike="noStrike" cap="none">
+              <a:solidFill>
+                <a:srgbClr val="2E2E3A"/>
+              </a:solidFill>
+              <a:latin typeface="Calibri"/>
+              <a:ea typeface="Calibri"/>
+              <a:cs typeface="Calibri"/>
+              <a:sym typeface="Calibri"/>
+            </a:endParaRPr>
+          </a:p>
+          <a:p>
+            <a:pPr marL="457200" lvl="0" indent="-323850" algn="l" rtl="0">
+              <a:lnSpc>
+                <a:spcPct val="108000"/>
+              </a:lnSpc>
+              <a:spcBef>
+                <a:spcPts val="0"/>
+              </a:spcBef>
+              <a:spcAft>
+                <a:spcPts val="0"/>
+              </a:spcAft>
+              <a:buClr>
+                <a:srgbClr val="2E2E3A"/>
+              </a:buClr>
+              <a:buSzPts val="1500"/>
+              <a:buFont typeface="Calibri"/>
+              <a:buChar char="●"/>
+            </a:pPr>
+            <a:r>
+              <a:rPr lang="en-US" sz="1500">
+                <a:solidFill>
+                  <a:srgbClr val="2E2E3A"/>
+                </a:solidFill>
+                <a:latin typeface="Calibri"/>
+                <a:ea typeface="Calibri"/>
+                <a:cs typeface="Calibri"/>
+                <a:sym typeface="Calibri"/>
+              </a:rPr>
+              <a:t>Analysed training dynamics and documented the results.</a:t>
+            </a:r>
+            <a:endParaRPr sz="1500">
+              <a:solidFill>
+                <a:schemeClr val="dk1"/>
+              </a:solidFill>
+              <a:latin typeface="Calibri"/>
+              <a:ea typeface="Calibri"/>
+              <a:cs typeface="Calibri"/>
+              <a:sym typeface="Calibri"/>
+            </a:endParaRPr>
+          </a:p>
+          <a:p>
+            <a:pPr marL="457200" lvl="0" indent="-323850" algn="l" rtl="0">
+              <a:lnSpc>
+                <a:spcPct val="108000"/>
+              </a:lnSpc>
+              <a:spcBef>
+                <a:spcPts val="0"/>
+              </a:spcBef>
+              <a:spcAft>
+                <a:spcPts val="0"/>
+              </a:spcAft>
+              <a:buClr>
+                <a:srgbClr val="2E2E3A"/>
+              </a:buClr>
+              <a:buSzPts val="1500"/>
+              <a:buFont typeface="Calibri"/>
+              <a:buChar char="●"/>
+            </a:pPr>
+            <a:r>
+              <a:rPr lang="en-US" sz="1500">
+                <a:solidFill>
+                  <a:srgbClr val="2E2E3A"/>
+                </a:solidFill>
+                <a:latin typeface="Calibri"/>
+                <a:ea typeface="Calibri"/>
+                <a:cs typeface="Calibri"/>
+                <a:sym typeface="Calibri"/>
+              </a:rPr>
+              <a:t>Verified generated image quality across epochs.</a:t>
+            </a:r>
+            <a:endParaRPr sz="1500">
+              <a:solidFill>
+                <a:srgbClr val="2E2E3A"/>
+              </a:solidFill>
+              <a:latin typeface="Calibri"/>
+              <a:ea typeface="Calibri"/>
+              <a:cs typeface="Calibri"/>
+              <a:sym typeface="Calibri"/>
+            </a:endParaRPr>
+          </a:p>
+          <a:p>
+            <a:pPr marL="457200" marR="0" lvl="0" indent="0" algn="l" rtl="0">
+              <a:lnSpc>
+                <a:spcPct val="108000"/>
+              </a:lnSpc>
+              <a:spcBef>
+                <a:spcPts val="1200"/>
+              </a:spcBef>
+              <a:spcAft>
+                <a:spcPts val="0"/>
+              </a:spcAft>
+              <a:buNone/>
+            </a:pPr>
+            <a:endParaRPr sz="1500" b="0" i="0" u="none" strike="noStrike" cap="none">
+              <a:solidFill>
+                <a:schemeClr val="dk1"/>
+              </a:solidFill>
+              <a:latin typeface="Calibri"/>
+              <a:ea typeface="Calibri"/>
+              <a:cs typeface="Calibri"/>
+              <a:sym typeface="Calibri"/>
+            </a:endParaRPr>
+          </a:p>
+        </p:txBody>
+      </p:sp>
+      <p:sp>
+        <p:nvSpPr>
+          <p:cNvPr id="418" name="Google Shape;418;p21"/>
+          <p:cNvSpPr txBox="1"/>
+          <p:nvPr/>
+        </p:nvSpPr>
+        <p:spPr>
+          <a:xfrm>
+            <a:off x="548640" y="6492240"/>
+            <a:ext cx="7315200" cy="274320"/>
+          </a:xfrm>
+          <a:prstGeom prst="rect">
+            <a:avLst/>
+          </a:prstGeom>
+          <a:noFill/>
+          <a:ln>
+            <a:noFill/>
+          </a:ln>
+        </p:spPr>
+        <p:txBody>
+          <a:bodyPr spcFirstLastPara="1" wrap="square" lIns="0" tIns="0" rIns="0" bIns="0" anchor="ctr" anchorCtr="0">
+            <a:noAutofit/>
+          </a:bodyPr>
+          <a:lstStyle/>
+          <a:p>
+            <a:pPr marL="0" marR="0" lvl="0" indent="0" algn="l" rtl="0">
+              <a:spcBef>
+                <a:spcPts val="0"/>
+              </a:spcBef>
+              <a:spcAft>
+                <a:spcPts val="0"/>
+              </a:spcAft>
+              <a:buClr>
+                <a:srgbClr val="6E6E82"/>
+              </a:buClr>
+              <a:buSzPts val="900"/>
+              <a:buFont typeface="Calibri"/>
+              <a:buNone/>
+            </a:pPr>
+            <a:r>
+              <a:rPr lang="en-US" sz="900" b="0" i="0" u="none" strike="noStrike" cap="none">
+                <a:solidFill>
+                  <a:srgbClr val="6E6E82"/>
+                </a:solidFill>
+                <a:latin typeface="Calibri"/>
+                <a:ea typeface="Calibri"/>
+                <a:cs typeface="Calibri"/>
+                <a:sym typeface="Calibri"/>
+              </a:rPr>
+              <a:t>GAN-Based Handwritten Digit Generation</a:t>
+            </a:r>
+            <a:endParaRPr sz="900" b="0" i="0" u="none" strike="noStrike" cap="none">
+              <a:solidFill>
+                <a:schemeClr val="dk1"/>
+              </a:solidFill>
+              <a:latin typeface="Calibri"/>
+              <a:ea typeface="Calibri"/>
+              <a:cs typeface="Calibri"/>
+              <a:sym typeface="Calibri"/>
+            </a:endParaRPr>
+          </a:p>
+        </p:txBody>
+      </p:sp>
+      <p:sp>
+        <p:nvSpPr>
+          <p:cNvPr id="419" name="Google Shape;419;p21"/>
+          <p:cNvSpPr txBox="1"/>
+          <p:nvPr/>
+        </p:nvSpPr>
+        <p:spPr>
+          <a:xfrm>
+            <a:off x="11274552" y="6492240"/>
+            <a:ext cx="365760" cy="274320"/>
+          </a:xfrm>
+          <a:prstGeom prst="rect">
+            <a:avLst/>
+          </a:prstGeom>
+          <a:noFill/>
+          <a:ln>
+            <a:noFill/>
+          </a:ln>
+        </p:spPr>
+        <p:txBody>
+          <a:bodyPr spcFirstLastPara="1" wrap="square" lIns="0" tIns="0" rIns="0" bIns="0" anchor="ctr" anchorCtr="0">
+            <a:noAutofit/>
+          </a:bodyPr>
+          <a:lstStyle/>
+          <a:p>
+            <a:pPr marL="0" marR="0" lvl="0" indent="0" algn="r" rtl="0">
+              <a:spcBef>
+                <a:spcPts val="0"/>
+              </a:spcBef>
+              <a:spcAft>
+                <a:spcPts val="0"/>
+              </a:spcAft>
+              <a:buClr>
+                <a:srgbClr val="6E6E82"/>
+              </a:buClr>
+              <a:buSzPts val="900"/>
+              <a:buFont typeface="Calibri"/>
+              <a:buNone/>
+            </a:pPr>
+            <a:r>
+              <a:rPr lang="en-US" sz="900" b="0" i="0" u="none" strike="noStrike" cap="none">
+                <a:solidFill>
+                  <a:srgbClr val="6E6E82"/>
+                </a:solidFill>
+                <a:latin typeface="Calibri"/>
+                <a:ea typeface="Calibri"/>
+                <a:cs typeface="Calibri"/>
+                <a:sym typeface="Calibri"/>
+              </a:rPr>
+              <a:t>19</a:t>
+            </a:r>
+            <a:endParaRPr sz="900" b="0" i="0" u="none" strike="noStrike" cap="none">
+              <a:solidFill>
+                <a:schemeClr val="dk1"/>
+              </a:solidFill>
+              <a:latin typeface="Calibri"/>
+              <a:ea typeface="Calibri"/>
+              <a:cs typeface="Calibri"/>
+              <a:sym typeface="Calibri"/>
+            </a:endParaRPr>
+          </a:p>
+        </p:txBody>
+      </p:sp>
+    </p:spTree>
+  </p:cSld>
+  <p:clrMapOvr>
+    <a:masterClrMapping/>
+  </p:clrMapOvr>
+</p:sld>
+</file>
+
+<file path=ppt/slides/slide21.xml><?xml version="1.0" encoding="utf-8"?>
 <p:sld xmlns:a="http://schemas.openxmlformats.org/drawingml/2006/main" xmlns:r="http://schemas.openxmlformats.org/officeDocument/2006/relationships" xmlns:p="http://schemas.openxmlformats.org/presentationml/2006/main">
   <p:cSld>
     <p:bg>
